--- a/CSCI250-Fall2026/content/Week11_RAG/slides.pptx
+++ b/CSCI250-Fall2026/content/Week11_RAG/slides.pptx
@@ -20,9 +20,6 @@
     <p:sldId id="268" r:id="rId19"/>
     <p:sldId id="269" r:id="rId20"/>
     <p:sldId id="270" r:id="rId21"/>
-    <p:sldId id="271" r:id="rId22"/>
-    <p:sldId id="272" r:id="rId23"/>
-    <p:sldId id="273" r:id="rId24"/>
   </p:sldIdLst>
   <p:sldSz cx="12191695" cy="6858000" type="screen4x3"/>
   <p:notesSz cx="6858000" cy="9144000"/>
@@ -3241,7 +3238,7 @@
     <p:bg>
       <p:bgPr>
         <a:solidFill>
-          <a:srgbClr val="128C8C"/>
+          <a:srgbClr val="FFFFFF"/>
         </a:solidFill>
         <a:effectLst/>
       </p:bgPr>
@@ -3255,14 +3252,102 @@
       <p:grpSpPr/>
       <p:sp>
         <p:nvSpPr>
-          <p:cNvPr id="2" name="TextBox 1"/>
+          <p:cNvPr id="2" name="Rectangle 1"/>
+          <p:cNvSpPr/>
+          <p:nvPr/>
+        </p:nvSpPr>
+        <p:spPr>
+          <a:xfrm>
+            <a:off x="0" y="0"/>
+            <a:ext cx="12191695" cy="1051560"/>
+          </a:xfrm>
+          <a:prstGeom prst="rect">
+            <a:avLst/>
+          </a:prstGeom>
+          <a:solidFill>
+            <a:srgbClr val="0B1F3A"/>
+          </a:solidFill>
+          <a:ln>
+            <a:noFill/>
+          </a:ln>
+          <a:effectLst/>
+        </p:spPr>
+        <p:style>
+          <a:lnRef idx="1">
+            <a:schemeClr val="accent1"/>
+          </a:lnRef>
+          <a:fillRef idx="3">
+            <a:schemeClr val="accent1"/>
+          </a:fillRef>
+          <a:effectRef idx="2">
+            <a:schemeClr val="accent1"/>
+          </a:effectRef>
+          <a:fontRef idx="minor">
+            <a:schemeClr val="lt1"/>
+          </a:fontRef>
+        </p:style>
+        <p:txBody>
+          <a:bodyPr rtlCol="0" anchor="ctr"/>
+          <a:lstStyle/>
+          <a:p>
+            <a:pPr algn="ctr"/>
+          </a:p>
+        </p:txBody>
+      </p:sp>
+      <p:sp>
+        <p:nvSpPr>
+          <p:cNvPr id="3" name="Rectangle 2"/>
+          <p:cNvSpPr/>
+          <p:nvPr/>
+        </p:nvSpPr>
+        <p:spPr>
+          <a:xfrm>
+            <a:off x="0" y="1051560"/>
+            <a:ext cx="12191695" cy="54864"/>
+          </a:xfrm>
+          <a:prstGeom prst="rect">
+            <a:avLst/>
+          </a:prstGeom>
+          <a:solidFill>
+            <a:srgbClr val="128C8C"/>
+          </a:solidFill>
+          <a:ln>
+            <a:noFill/>
+          </a:ln>
+          <a:effectLst/>
+        </p:spPr>
+        <p:style>
+          <a:lnRef idx="1">
+            <a:schemeClr val="accent1"/>
+          </a:lnRef>
+          <a:fillRef idx="3">
+            <a:schemeClr val="accent1"/>
+          </a:fillRef>
+          <a:effectRef idx="2">
+            <a:schemeClr val="accent1"/>
+          </a:effectRef>
+          <a:fontRef idx="minor">
+            <a:schemeClr val="lt1"/>
+          </a:fontRef>
+        </p:style>
+        <p:txBody>
+          <a:bodyPr rtlCol="0" anchor="ctr"/>
+          <a:lstStyle/>
+          <a:p>
+            <a:pPr algn="ctr"/>
+          </a:p>
+        </p:txBody>
+      </p:sp>
+      <p:sp>
+        <p:nvSpPr>
+          <p:cNvPr id="4" name="TextBox 3"/>
           <p:cNvSpPr txBox="1"/>
           <p:nvPr/>
         </p:nvSpPr>
         <p:spPr>
           <a:xfrm>
-            <a:off x="822960" y="2743200"/>
-            <a:ext cx="10515600" cy="1371600"/>
+            <a:off x="548640" y="201168"/>
+            <a:ext cx="11064240" cy="731520"/>
           </a:xfrm>
           <a:prstGeom prst="rect">
             <a:avLst/>
@@ -3277,13 +3362,186 @@
           <a:p>
             <a:pPr algn="l"/>
             <a:r>
-              <a:rPr sz="3600" b="1">
+              <a:rPr sz="2800" b="1">
                 <a:solidFill>
                   <a:srgbClr val="FFFFFF"/>
                 </a:solidFill>
                 <a:latin typeface="Calibri"/>
               </a:rPr>
-              <a:t>Retrieve &amp; Ground</a:t>
+              <a:t>Cite Sources &amp; Know Your Limits</a:t>
+            </a:r>
+          </a:p>
+        </p:txBody>
+      </p:sp>
+      <p:sp>
+        <p:nvSpPr>
+          <p:cNvPr id="5" name="TextBox 4"/>
+          <p:cNvSpPr txBox="1"/>
+          <p:nvPr/>
+        </p:nvSpPr>
+        <p:spPr>
+          <a:xfrm>
+            <a:off x="731520" y="1371600"/>
+            <a:ext cx="10698480" cy="4754880"/>
+          </a:xfrm>
+          <a:prstGeom prst="rect">
+            <a:avLst/>
+          </a:prstGeom>
+          <a:noFill/>
+        </p:spPr>
+        <p:txBody>
+          <a:bodyPr wrap="square">
+            <a:spAutoFit/>
+          </a:bodyPr>
+          <a:lstStyle/>
+          <a:p>
+            <a:pPr>
+              <a:spcAft>
+                <a:spcPts val="800"/>
+              </a:spcAft>
+            </a:pPr>
+            <a:r>
+              <a:rPr sz="2000">
+                <a:solidFill>
+                  <a:srgbClr val="1A1A1A"/>
+                </a:solidFill>
+                <a:latin typeface="Calibri"/>
+              </a:rPr>
+              <a:t>• Show WHICH chunks/documents were used</a:t>
+            </a:r>
+          </a:p>
+          <a:p>
+            <a:pPr>
+              <a:spcAft>
+                <a:spcPts val="800"/>
+              </a:spcAft>
+            </a:pPr>
+            <a:r>
+              <a:rPr sz="2000">
+                <a:solidFill>
+                  <a:srgbClr val="1A1A1A"/>
+                </a:solidFill>
+                <a:latin typeface="Calibri"/>
+              </a:rPr>
+              <a:t>• Answer "I don't know" when retrieval is empty or weak</a:t>
+            </a:r>
+          </a:p>
+          <a:p>
+            <a:pPr>
+              <a:spcAft>
+                <a:spcPts val="800"/>
+              </a:spcAft>
+            </a:pPr>
+            <a:r>
+              <a:rPr sz="2000">
+                <a:solidFill>
+                  <a:srgbClr val="1A1A1A"/>
+                </a:solidFill>
+                <a:latin typeface="Calibri"/>
+              </a:rPr>
+              <a:t>• Never invent a citation that wasn't retrieved</a:t>
+            </a:r>
+          </a:p>
+          <a:p>
+            <a:pPr lvl="1">
+              <a:spcAft>
+                <a:spcPts val="800"/>
+              </a:spcAft>
+            </a:pPr>
+            <a:r>
+              <a:rPr sz="1800">
+                <a:solidFill>
+                  <a:srgbClr val="6B7280"/>
+                </a:solidFill>
+                <a:latin typeface="Calibri"/>
+              </a:rPr>
+              <a:t>– Most RAG bugs are in RETRIEVAL, not generation</a:t>
+            </a:r>
+          </a:p>
+          <a:p>
+            <a:pPr lvl="1">
+              <a:spcAft>
+                <a:spcPts val="800"/>
+              </a:spcAft>
+            </a:pPr>
+            <a:r>
+              <a:rPr sz="1800">
+                <a:solidFill>
+                  <a:srgbClr val="6B7280"/>
+                </a:solidFill>
+                <a:latin typeface="Calibri"/>
+              </a:rPr>
+              <a:t>– Print the retrieved chunks FIRST when debugging</a:t>
+            </a:r>
+          </a:p>
+        </p:txBody>
+      </p:sp>
+      <p:sp>
+        <p:nvSpPr>
+          <p:cNvPr id="6" name="TextBox 5"/>
+          <p:cNvSpPr txBox="1"/>
+          <p:nvPr/>
+        </p:nvSpPr>
+        <p:spPr>
+          <a:xfrm>
+            <a:off x="365760" y="6446520"/>
+            <a:ext cx="8229600" cy="365760"/>
+          </a:xfrm>
+          <a:prstGeom prst="rect">
+            <a:avLst/>
+          </a:prstGeom>
+          <a:noFill/>
+        </p:spPr>
+        <p:txBody>
+          <a:bodyPr wrap="square">
+            <a:spAutoFit/>
+          </a:bodyPr>
+          <a:lstStyle/>
+          <a:p>
+            <a:pPr algn="l"/>
+            <a:r>
+              <a:rPr sz="1000" b="0">
+                <a:solidFill>
+                  <a:srgbClr val="6B7280"/>
+                </a:solidFill>
+                <a:latin typeface="Calibri"/>
+              </a:rPr>
+              <a:t>Palomar College · CSCI 250 · Fall 2026</a:t>
+            </a:r>
+          </a:p>
+        </p:txBody>
+      </p:sp>
+      <p:sp>
+        <p:nvSpPr>
+          <p:cNvPr id="7" name="TextBox 6"/>
+          <p:cNvSpPr txBox="1"/>
+          <p:nvPr/>
+        </p:nvSpPr>
+        <p:spPr>
+          <a:xfrm>
+            <a:off x="11155680" y="6446520"/>
+            <a:ext cx="822960" cy="365760"/>
+          </a:xfrm>
+          <a:prstGeom prst="rect">
+            <a:avLst/>
+          </a:prstGeom>
+          <a:noFill/>
+        </p:spPr>
+        <p:txBody>
+          <a:bodyPr wrap="square">
+            <a:spAutoFit/>
+          </a:bodyPr>
+          <a:lstStyle/>
+          <a:p>
+            <a:pPr algn="r"/>
+            <a:r>
+              <a:rPr sz="1000" b="0">
+                <a:solidFill>
+                  <a:srgbClr val="6B7280"/>
+                </a:solidFill>
+                <a:latin typeface="Calibri"/>
+              </a:rPr>
+              <a:t>10/15</a:t>
             </a:r>
           </a:p>
         </p:txBody>
@@ -3302,7 +3560,7 @@
     <p:bg>
       <p:bgPr>
         <a:solidFill>
-          <a:srgbClr val="FFFFFF"/>
+          <a:srgbClr val="128C8C"/>
         </a:solidFill>
         <a:effectLst/>
       </p:bgPr>
@@ -3316,102 +3574,14 @@
       <p:grpSpPr/>
       <p:sp>
         <p:nvSpPr>
-          <p:cNvPr id="2" name="Rectangle 1"/>
-          <p:cNvSpPr/>
-          <p:nvPr/>
-        </p:nvSpPr>
-        <p:spPr>
-          <a:xfrm>
-            <a:off x="0" y="0"/>
-            <a:ext cx="12191695" cy="1051560"/>
-          </a:xfrm>
-          <a:prstGeom prst="rect">
-            <a:avLst/>
-          </a:prstGeom>
-          <a:solidFill>
-            <a:srgbClr val="0B1F3A"/>
-          </a:solidFill>
-          <a:ln>
-            <a:noFill/>
-          </a:ln>
-          <a:effectLst/>
-        </p:spPr>
-        <p:style>
-          <a:lnRef idx="1">
-            <a:schemeClr val="accent1"/>
-          </a:lnRef>
-          <a:fillRef idx="3">
-            <a:schemeClr val="accent1"/>
-          </a:fillRef>
-          <a:effectRef idx="2">
-            <a:schemeClr val="accent1"/>
-          </a:effectRef>
-          <a:fontRef idx="minor">
-            <a:schemeClr val="lt1"/>
-          </a:fontRef>
-        </p:style>
-        <p:txBody>
-          <a:bodyPr rtlCol="0" anchor="ctr"/>
-          <a:lstStyle/>
-          <a:p>
-            <a:pPr algn="ctr"/>
-          </a:p>
-        </p:txBody>
-      </p:sp>
-      <p:sp>
-        <p:nvSpPr>
-          <p:cNvPr id="3" name="Rectangle 2"/>
-          <p:cNvSpPr/>
-          <p:nvPr/>
-        </p:nvSpPr>
-        <p:spPr>
-          <a:xfrm>
-            <a:off x="0" y="1051560"/>
-            <a:ext cx="12191695" cy="54864"/>
-          </a:xfrm>
-          <a:prstGeom prst="rect">
-            <a:avLst/>
-          </a:prstGeom>
-          <a:solidFill>
-            <a:srgbClr val="128C8C"/>
-          </a:solidFill>
-          <a:ln>
-            <a:noFill/>
-          </a:ln>
-          <a:effectLst/>
-        </p:spPr>
-        <p:style>
-          <a:lnRef idx="1">
-            <a:schemeClr val="accent1"/>
-          </a:lnRef>
-          <a:fillRef idx="3">
-            <a:schemeClr val="accent1"/>
-          </a:fillRef>
-          <a:effectRef idx="2">
-            <a:schemeClr val="accent1"/>
-          </a:effectRef>
-          <a:fontRef idx="minor">
-            <a:schemeClr val="lt1"/>
-          </a:fontRef>
-        </p:style>
-        <p:txBody>
-          <a:bodyPr rtlCol="0" anchor="ctr"/>
-          <a:lstStyle/>
-          <a:p>
-            <a:pPr algn="ctr"/>
-          </a:p>
-        </p:txBody>
-      </p:sp>
-      <p:sp>
-        <p:nvSpPr>
-          <p:cNvPr id="4" name="TextBox 3"/>
+          <p:cNvPr id="2" name="TextBox 1"/>
           <p:cNvSpPr txBox="1"/>
           <p:nvPr/>
         </p:nvSpPr>
         <p:spPr>
           <a:xfrm>
-            <a:off x="548640" y="201168"/>
-            <a:ext cx="11064240" cy="731520"/>
+            <a:off x="822960" y="2743200"/>
+            <a:ext cx="10515600" cy="1371600"/>
           </a:xfrm>
           <a:prstGeom prst="rect">
             <a:avLst/>
@@ -3426,270 +3596,13 @@
           <a:p>
             <a:pPr algn="l"/>
             <a:r>
-              <a:rPr sz="2800" b="1">
+              <a:rPr sz="3600" b="1">
                 <a:solidFill>
                   <a:srgbClr val="FFFFFF"/>
                 </a:solidFill>
                 <a:latin typeface="Calibri"/>
               </a:rPr>
-              <a:t>Retrieve, then Ground the Prompt</a:t>
-            </a:r>
-          </a:p>
-        </p:txBody>
-      </p:sp>
-      <p:sp>
-        <p:nvSpPr>
-          <p:cNvPr id="5" name="Rectangle 4"/>
-          <p:cNvSpPr/>
-          <p:nvPr/>
-        </p:nvSpPr>
-        <p:spPr>
-          <a:xfrm>
-            <a:off x="548640" y="1325880"/>
-            <a:ext cx="11064240" cy="4480560"/>
-          </a:xfrm>
-          <a:prstGeom prst="rect">
-            <a:avLst/>
-          </a:prstGeom>
-          <a:solidFill>
-            <a:srgbClr val="1E1E1E"/>
-          </a:solidFill>
-          <a:ln>
-            <a:noFill/>
-          </a:ln>
-          <a:effectLst/>
-        </p:spPr>
-        <p:style>
-          <a:lnRef idx="1">
-            <a:schemeClr val="accent1"/>
-          </a:lnRef>
-          <a:fillRef idx="3">
-            <a:schemeClr val="accent1"/>
-          </a:fillRef>
-          <a:effectRef idx="2">
-            <a:schemeClr val="accent1"/>
-          </a:effectRef>
-          <a:fontRef idx="minor">
-            <a:schemeClr val="lt1"/>
-          </a:fontRef>
-        </p:style>
-        <p:txBody>
-          <a:bodyPr rtlCol="0" anchor="ctr" wrap="square" lIns="182880" tIns="137160"/>
-          <a:lstStyle/>
-          <a:p>
-            <a:pPr algn="ctr"/>
-            <a:r>
-              <a:rPr sz="1500">
-                <a:solidFill>
-                  <a:srgbClr val="E6E6E6"/>
-                </a:solidFill>
-                <a:latin typeface="Consolas"/>
-              </a:rPr>
-              <a:t>res = col.query(query_texts=[question], n_results=3)</a:t>
-            </a:r>
-          </a:p>
-          <a:p>
-            <a:r>
-              <a:rPr sz="1500">
-                <a:solidFill>
-                  <a:srgbClr val="E6E6E6"/>
-                </a:solidFill>
-                <a:latin typeface="Consolas"/>
-              </a:rPr>
-              <a:t>retrieved = res['documents'][0]</a:t>
-            </a:r>
-          </a:p>
-          <a:p>
-            <a:r>
-              <a:rPr sz="1500">
-                <a:solidFill>
-                  <a:srgbClr val="E6E6E6"/>
-                </a:solidFill>
-                <a:latin typeface="Consolas"/>
-              </a:rPr>
-              <a:t>context = '\n\n'.join(f'[{i+1}] {c}'</a:t>
-            </a:r>
-          </a:p>
-          <a:p>
-            <a:r>
-              <a:rPr sz="1500">
-                <a:solidFill>
-                  <a:srgbClr val="E6E6E6"/>
-                </a:solidFill>
-                <a:latin typeface="Consolas"/>
-              </a:rPr>
-              <a:t>                       for i, c in enumerate(retrieved))</a:t>
-            </a:r>
-          </a:p>
-          <a:p>
-            <a:r>
-              <a:rPr sz="1500">
-                <a:solidFill>
-                  <a:srgbClr val="E6E6E6"/>
-                </a:solidFill>
-                <a:latin typeface="Consolas"/>
-              </a:rPr>
-              <a:t> </a:t>
-            </a:r>
-          </a:p>
-          <a:p>
-            <a:r>
-              <a:rPr sz="1500">
-                <a:solidFill>
-                  <a:srgbClr val="E6E6E6"/>
-                </a:solidFill>
-                <a:latin typeface="Consolas"/>
-              </a:rPr>
-              <a:t>prompt = f'''Answer using ONLY the context below.</a:t>
-            </a:r>
-          </a:p>
-          <a:p>
-            <a:r>
-              <a:rPr sz="1500">
-                <a:solidFill>
-                  <a:srgbClr val="E6E6E6"/>
-                </a:solidFill>
-                <a:latin typeface="Consolas"/>
-              </a:rPr>
-              <a:t>If it is not in the context, say "I don't know."</a:t>
-            </a:r>
-          </a:p>
-          <a:p>
-            <a:r>
-              <a:rPr sz="1500">
-                <a:solidFill>
-                  <a:srgbClr val="E6E6E6"/>
-                </a:solidFill>
-                <a:latin typeface="Consolas"/>
-              </a:rPr>
-              <a:t>Cite sources by [number].</a:t>
-            </a:r>
-          </a:p>
-          <a:p>
-            <a:r>
-              <a:rPr sz="1500">
-                <a:solidFill>
-                  <a:srgbClr val="E6E6E6"/>
-                </a:solidFill>
-                <a:latin typeface="Consolas"/>
-              </a:rPr>
-              <a:t> </a:t>
-            </a:r>
-          </a:p>
-          <a:p>
-            <a:r>
-              <a:rPr sz="1500">
-                <a:solidFill>
-                  <a:srgbClr val="E6E6E6"/>
-                </a:solidFill>
-                <a:latin typeface="Consolas"/>
-              </a:rPr>
-              <a:t>Context:\n{context}\n\nQuestion: {question}'''</a:t>
-            </a:r>
-          </a:p>
-        </p:txBody>
-      </p:sp>
-      <p:sp>
-        <p:nvSpPr>
-          <p:cNvPr id="6" name="TextBox 5"/>
-          <p:cNvSpPr txBox="1"/>
-          <p:nvPr/>
-        </p:nvSpPr>
-        <p:spPr>
-          <a:xfrm>
-            <a:off x="548640" y="5897880"/>
-            <a:ext cx="10515600" cy="457200"/>
-          </a:xfrm>
-          <a:prstGeom prst="rect">
-            <a:avLst/>
-          </a:prstGeom>
-          <a:noFill/>
-        </p:spPr>
-        <p:txBody>
-          <a:bodyPr wrap="square">
-            <a:spAutoFit/>
-          </a:bodyPr>
-          <a:lstStyle/>
-          <a:p>
-            <a:pPr algn="l"/>
-            <a:r>
-              <a:rPr sz="1400" b="0">
-                <a:solidFill>
-                  <a:srgbClr val="6B7280"/>
-                </a:solidFill>
-                <a:latin typeface="Calibri"/>
-              </a:rPr>
-              <a:t>The grounding instruction is the heart of RAG</a:t>
-            </a:r>
-          </a:p>
-        </p:txBody>
-      </p:sp>
-      <p:sp>
-        <p:nvSpPr>
-          <p:cNvPr id="7" name="TextBox 6"/>
-          <p:cNvSpPr txBox="1"/>
-          <p:nvPr/>
-        </p:nvSpPr>
-        <p:spPr>
-          <a:xfrm>
-            <a:off x="365760" y="6446520"/>
-            <a:ext cx="8229600" cy="365760"/>
-          </a:xfrm>
-          <a:prstGeom prst="rect">
-            <a:avLst/>
-          </a:prstGeom>
-          <a:noFill/>
-        </p:spPr>
-        <p:txBody>
-          <a:bodyPr wrap="square">
-            <a:spAutoFit/>
-          </a:bodyPr>
-          <a:lstStyle/>
-          <a:p>
-            <a:pPr algn="l"/>
-            <a:r>
-              <a:rPr sz="1000" b="0">
-                <a:solidFill>
-                  <a:srgbClr val="6B7280"/>
-                </a:solidFill>
-                <a:latin typeface="Calibri"/>
-              </a:rPr>
-              <a:t>Palomar College · CSCI 250 · Fall 2026</a:t>
-            </a:r>
-          </a:p>
-        </p:txBody>
-      </p:sp>
-      <p:sp>
-        <p:nvSpPr>
-          <p:cNvPr id="8" name="TextBox 7"/>
-          <p:cNvSpPr txBox="1"/>
-          <p:nvPr/>
-        </p:nvSpPr>
-        <p:spPr>
-          <a:xfrm>
-            <a:off x="11155680" y="6446520"/>
-            <a:ext cx="822960" cy="365760"/>
-          </a:xfrm>
-          <a:prstGeom prst="rect">
-            <a:avLst/>
-          </a:prstGeom>
-          <a:noFill/>
-        </p:spPr>
-        <p:txBody>
-          <a:bodyPr wrap="square">
-            <a:spAutoFit/>
-          </a:bodyPr>
-          <a:lstStyle/>
-          <a:p>
-            <a:pPr algn="r"/>
-            <a:r>
-              <a:rPr sz="1000" b="0">
-                <a:solidFill>
-                  <a:srgbClr val="6B7280"/>
-                </a:solidFill>
-                <a:latin typeface="Calibri"/>
-              </a:rPr>
-              <a:t>11/18</a:t>
+              <a:t>Evaluate RAG — Measure, Don't Guess</a:t>
             </a:r>
           </a:p>
         </p:txBody>
@@ -3838,195 +3751,21 @@
                 </a:solidFill>
                 <a:latin typeface="Calibri"/>
               </a:rPr>
-              <a:t>Generate — Claude &amp; Gemini</a:t>
-            </a:r>
-          </a:p>
-        </p:txBody>
-      </p:sp>
-      <p:sp>
-        <p:nvSpPr>
-          <p:cNvPr id="5" name="Rectangle 4"/>
-          <p:cNvSpPr/>
-          <p:nvPr/>
-        </p:nvSpPr>
-        <p:spPr>
-          <a:xfrm>
-            <a:off x="548640" y="1325880"/>
-            <a:ext cx="11064240" cy="4480560"/>
-          </a:xfrm>
-          <a:prstGeom prst="rect">
-            <a:avLst/>
-          </a:prstGeom>
-          <a:solidFill>
-            <a:srgbClr val="1E1E1E"/>
-          </a:solidFill>
-          <a:ln>
-            <a:noFill/>
-          </a:ln>
-          <a:effectLst/>
-        </p:spPr>
-        <p:style>
-          <a:lnRef idx="1">
-            <a:schemeClr val="accent1"/>
-          </a:lnRef>
-          <a:fillRef idx="3">
-            <a:schemeClr val="accent1"/>
-          </a:fillRef>
-          <a:effectRef idx="2">
-            <a:schemeClr val="accent1"/>
-          </a:effectRef>
-          <a:fontRef idx="minor">
-            <a:schemeClr val="lt1"/>
-          </a:fontRef>
-        </p:style>
-        <p:txBody>
-          <a:bodyPr rtlCol="0" anchor="ctr" wrap="square" lIns="182880" tIns="137160"/>
-          <a:lstStyle/>
-          <a:p>
-            <a:pPr algn="ctr"/>
-            <a:r>
-              <a:rPr sz="1500">
-                <a:solidFill>
-                  <a:srgbClr val="E6E6E6"/>
-                </a:solidFill>
-                <a:latin typeface="Consolas"/>
-              </a:rPr>
-              <a:t># Claude</a:t>
-            </a:r>
-          </a:p>
-          <a:p>
-            <a:r>
-              <a:rPr sz="1500">
-                <a:solidFill>
-                  <a:srgbClr val="E6E6E6"/>
-                </a:solidFill>
-                <a:latin typeface="Consolas"/>
-              </a:rPr>
-              <a:t>import anthropic</a:t>
-            </a:r>
-          </a:p>
-          <a:p>
-            <a:r>
-              <a:rPr sz="1500">
-                <a:solidFill>
-                  <a:srgbClr val="E6E6E6"/>
-                </a:solidFill>
-                <a:latin typeface="Consolas"/>
-              </a:rPr>
-              <a:t>msg = anthropic.Anthropic().messages.create(</a:t>
-            </a:r>
-          </a:p>
-          <a:p>
-            <a:r>
-              <a:rPr sz="1500">
-                <a:solidFill>
-                  <a:srgbClr val="E6E6E6"/>
-                </a:solidFill>
-                <a:latin typeface="Consolas"/>
-              </a:rPr>
-              <a:t>    model='claude-sonnet-4-6', max_tokens=400,</a:t>
-            </a:r>
-          </a:p>
-          <a:p>
-            <a:r>
-              <a:rPr sz="1500">
-                <a:solidFill>
-                  <a:srgbClr val="E6E6E6"/>
-                </a:solidFill>
-                <a:latin typeface="Consolas"/>
-              </a:rPr>
-              <a:t>    messages=[{'role':'user','content':prompt}])</a:t>
-            </a:r>
-          </a:p>
-          <a:p>
-            <a:r>
-              <a:rPr sz="1500">
-                <a:solidFill>
-                  <a:srgbClr val="E6E6E6"/>
-                </a:solidFill>
-                <a:latin typeface="Consolas"/>
-              </a:rPr>
-              <a:t>print(msg.content[0].text)</a:t>
-            </a:r>
-          </a:p>
-          <a:p>
-            <a:r>
-              <a:rPr sz="1500">
-                <a:solidFill>
-                  <a:srgbClr val="E6E6E6"/>
-                </a:solidFill>
-                <a:latin typeface="Consolas"/>
-              </a:rPr>
-              <a:t> </a:t>
-            </a:r>
-          </a:p>
-          <a:p>
-            <a:r>
-              <a:rPr sz="1500">
-                <a:solidFill>
-                  <a:srgbClr val="E6E6E6"/>
-                </a:solidFill>
-                <a:latin typeface="Consolas"/>
-              </a:rPr>
-              <a:t># Gemini</a:t>
-            </a:r>
-          </a:p>
-          <a:p>
-            <a:r>
-              <a:rPr sz="1500">
-                <a:solidFill>
-                  <a:srgbClr val="E6E6E6"/>
-                </a:solidFill>
-                <a:latin typeface="Consolas"/>
-              </a:rPr>
-              <a:t>import google.generativeai as genai</a:t>
-            </a:r>
-          </a:p>
-          <a:p>
-            <a:r>
-              <a:rPr sz="1500">
-                <a:solidFill>
-                  <a:srgbClr val="E6E6E6"/>
-                </a:solidFill>
-                <a:latin typeface="Consolas"/>
-              </a:rPr>
-              <a:t>genai.configure(api_key=os.environ['GEMINI_API_KEY'])</a:t>
-            </a:r>
-          </a:p>
-          <a:p>
-            <a:r>
-              <a:rPr sz="1500">
-                <a:solidFill>
-                  <a:srgbClr val="E6E6E6"/>
-                </a:solidFill>
-                <a:latin typeface="Consolas"/>
-              </a:rPr>
-              <a:t>g = genai.GenerativeModel('gemini-2.5-flash')</a:t>
-            </a:r>
-          </a:p>
-          <a:p>
-            <a:r>
-              <a:rPr sz="1500">
-                <a:solidFill>
-                  <a:srgbClr val="E6E6E6"/>
-                </a:solidFill>
-                <a:latin typeface="Consolas"/>
-              </a:rPr>
-              <a:t>print(g.generate_content(prompt).text)</a:t>
-            </a:r>
-          </a:p>
-        </p:txBody>
-      </p:sp>
-      <p:sp>
-        <p:nvSpPr>
-          <p:cNvPr id="6" name="TextBox 5"/>
+              <a:t>The RAG Triad</a:t>
+            </a:r>
+          </a:p>
+        </p:txBody>
+      </p:sp>
+      <p:sp>
+        <p:nvSpPr>
+          <p:cNvPr id="5" name="TextBox 4"/>
           <p:cNvSpPr txBox="1"/>
           <p:nvPr/>
         </p:nvSpPr>
         <p:spPr>
           <a:xfrm>
-            <a:off x="548640" y="5897880"/>
-            <a:ext cx="10515600" cy="457200"/>
+            <a:off x="731520" y="1280160"/>
+            <a:ext cx="5120640" cy="548640"/>
           </a:xfrm>
           <a:prstGeom prst="rect">
             <a:avLst/>
@@ -4041,27 +3780,27 @@
           <a:p>
             <a:pPr algn="l"/>
             <a:r>
-              <a:rPr sz="1400" b="0">
-                <a:solidFill>
-                  <a:srgbClr val="6B7280"/>
-                </a:solidFill>
-                <a:latin typeface="Calibri"/>
-              </a:rPr>
-              <a:t>Same retrieved context, two generators — compare faithfulness</a:t>
-            </a:r>
-          </a:p>
-        </p:txBody>
-      </p:sp>
-      <p:sp>
-        <p:nvSpPr>
-          <p:cNvPr id="7" name="TextBox 6"/>
+              <a:rPr sz="2000" b="1">
+                <a:solidFill>
+                  <a:srgbClr val="128C8C"/>
+                </a:solidFill>
+                <a:latin typeface="Calibri"/>
+              </a:rPr>
+              <a:t>Three links to check</a:t>
+            </a:r>
+          </a:p>
+        </p:txBody>
+      </p:sp>
+      <p:sp>
+        <p:nvSpPr>
+          <p:cNvPr id="6" name="TextBox 5"/>
           <p:cNvSpPr txBox="1"/>
           <p:nvPr/>
         </p:nvSpPr>
         <p:spPr>
           <a:xfrm>
-            <a:off x="365760" y="6446520"/>
-            <a:ext cx="8229600" cy="365760"/>
+            <a:off x="731520" y="1828800"/>
+            <a:ext cx="5120640" cy="4206240"/>
           </a:xfrm>
           <a:prstGeom prst="rect">
             <a:avLst/>
@@ -4074,29 +3813,81 @@
           </a:bodyPr>
           <a:lstStyle/>
           <a:p>
-            <a:pPr algn="l"/>
-            <a:r>
-              <a:rPr sz="1000" b="0">
-                <a:solidFill>
-                  <a:srgbClr val="6B7280"/>
-                </a:solidFill>
-                <a:latin typeface="Calibri"/>
-              </a:rPr>
-              <a:t>Palomar College · CSCI 250 · Fall 2026</a:t>
-            </a:r>
-          </a:p>
-        </p:txBody>
-      </p:sp>
-      <p:sp>
-        <p:nvSpPr>
-          <p:cNvPr id="8" name="TextBox 7"/>
+            <a:pPr>
+              <a:spcAft>
+                <a:spcPts val="800"/>
+              </a:spcAft>
+            </a:pPr>
+            <a:r>
+              <a:rPr sz="1800">
+                <a:solidFill>
+                  <a:srgbClr val="1A1A1A"/>
+                </a:solidFill>
+                <a:latin typeface="Calibri"/>
+              </a:rPr>
+              <a:t>• Context Relevance: right chunks?</a:t>
+            </a:r>
+          </a:p>
+          <a:p>
+            <a:pPr>
+              <a:spcAft>
+                <a:spcPts val="800"/>
+              </a:spcAft>
+            </a:pPr>
+            <a:r>
+              <a:rPr sz="1800">
+                <a:solidFill>
+                  <a:srgbClr val="1A1A1A"/>
+                </a:solidFill>
+                <a:latin typeface="Calibri"/>
+              </a:rPr>
+              <a:t>• Groundedness: answer supported?</a:t>
+            </a:r>
+          </a:p>
+          <a:p>
+            <a:pPr>
+              <a:spcAft>
+                <a:spcPts val="800"/>
+              </a:spcAft>
+            </a:pPr>
+            <a:r>
+              <a:rPr sz="1800">
+                <a:solidFill>
+                  <a:srgbClr val="1A1A1A"/>
+                </a:solidFill>
+                <a:latin typeface="Calibri"/>
+              </a:rPr>
+              <a:t>• Answer Relevance: on topic?</a:t>
+            </a:r>
+          </a:p>
+          <a:p>
+            <a:pPr>
+              <a:spcAft>
+                <a:spcPts val="800"/>
+              </a:spcAft>
+            </a:pPr>
+            <a:r>
+              <a:rPr sz="1800">
+                <a:solidFill>
+                  <a:srgbClr val="1A1A1A"/>
+                </a:solidFill>
+                <a:latin typeface="Calibri"/>
+              </a:rPr>
+              <a:t>• Each scored 1-5 by an LLM judge</a:t>
+            </a:r>
+          </a:p>
+        </p:txBody>
+      </p:sp>
+      <p:sp>
+        <p:nvSpPr>
+          <p:cNvPr id="7" name="TextBox 6"/>
           <p:cNvSpPr txBox="1"/>
           <p:nvPr/>
         </p:nvSpPr>
         <p:spPr>
           <a:xfrm>
-            <a:off x="11155680" y="6446520"/>
-            <a:ext cx="822960" cy="365760"/>
+            <a:off x="6309360" y="1280160"/>
+            <a:ext cx="5120640" cy="548640"/>
           </a:xfrm>
           <a:prstGeom prst="rect">
             <a:avLst/>
@@ -4109,6 +3900,163 @@
           </a:bodyPr>
           <a:lstStyle/>
           <a:p>
+            <a:pPr algn="l"/>
+            <a:r>
+              <a:rPr sz="2000" b="1">
+                <a:solidFill>
+                  <a:srgbClr val="128C8C"/>
+                </a:solidFill>
+                <a:latin typeface="Calibri"/>
+              </a:rPr>
+              <a:t>Why it's powerful</a:t>
+            </a:r>
+          </a:p>
+        </p:txBody>
+      </p:sp>
+      <p:sp>
+        <p:nvSpPr>
+          <p:cNvPr id="8" name="TextBox 7"/>
+          <p:cNvSpPr txBox="1"/>
+          <p:nvPr/>
+        </p:nvSpPr>
+        <p:spPr>
+          <a:xfrm>
+            <a:off x="6309360" y="1828800"/>
+            <a:ext cx="5120640" cy="4206240"/>
+          </a:xfrm>
+          <a:prstGeom prst="rect">
+            <a:avLst/>
+          </a:prstGeom>
+          <a:noFill/>
+        </p:spPr>
+        <p:txBody>
+          <a:bodyPr wrap="square">
+            <a:spAutoFit/>
+          </a:bodyPr>
+          <a:lstStyle/>
+          <a:p>
+            <a:pPr>
+              <a:spcAft>
+                <a:spcPts val="800"/>
+              </a:spcAft>
+            </a:pPr>
+            <a:r>
+              <a:rPr sz="1800">
+                <a:solidFill>
+                  <a:srgbClr val="1A1A1A"/>
+                </a:solidFill>
+                <a:latin typeface="Calibri"/>
+              </a:rPr>
+              <a:t>• Localizes the failure</a:t>
+            </a:r>
+          </a:p>
+          <a:p>
+            <a:pPr>
+              <a:spcAft>
+                <a:spcPts val="800"/>
+              </a:spcAft>
+            </a:pPr>
+            <a:r>
+              <a:rPr sz="1800">
+                <a:solidFill>
+                  <a:srgbClr val="1A1A1A"/>
+                </a:solidFill>
+                <a:latin typeface="Calibri"/>
+              </a:rPr>
+              <a:t>• Low context -&gt; fix retrieval</a:t>
+            </a:r>
+          </a:p>
+          <a:p>
+            <a:pPr>
+              <a:spcAft>
+                <a:spcPts val="800"/>
+              </a:spcAft>
+            </a:pPr>
+            <a:r>
+              <a:rPr sz="1800">
+                <a:solidFill>
+                  <a:srgbClr val="1A1A1A"/>
+                </a:solidFill>
+                <a:latin typeface="Calibri"/>
+              </a:rPr>
+              <a:t>• Low groundedness -&gt; fix prompt</a:t>
+            </a:r>
+          </a:p>
+          <a:p>
+            <a:pPr>
+              <a:spcAft>
+                <a:spcPts val="800"/>
+              </a:spcAft>
+            </a:pPr>
+            <a:r>
+              <a:rPr sz="1800">
+                <a:solidFill>
+                  <a:srgbClr val="1A1A1A"/>
+                </a:solidFill>
+                <a:latin typeface="Calibri"/>
+              </a:rPr>
+              <a:t>• Low answer rel. -&gt; fix framing</a:t>
+            </a:r>
+          </a:p>
+        </p:txBody>
+      </p:sp>
+      <p:sp>
+        <p:nvSpPr>
+          <p:cNvPr id="9" name="TextBox 8"/>
+          <p:cNvSpPr txBox="1"/>
+          <p:nvPr/>
+        </p:nvSpPr>
+        <p:spPr>
+          <a:xfrm>
+            <a:off x="365760" y="6446520"/>
+            <a:ext cx="8229600" cy="365760"/>
+          </a:xfrm>
+          <a:prstGeom prst="rect">
+            <a:avLst/>
+          </a:prstGeom>
+          <a:noFill/>
+        </p:spPr>
+        <p:txBody>
+          <a:bodyPr wrap="square">
+            <a:spAutoFit/>
+          </a:bodyPr>
+          <a:lstStyle/>
+          <a:p>
+            <a:pPr algn="l"/>
+            <a:r>
+              <a:rPr sz="1000" b="0">
+                <a:solidFill>
+                  <a:srgbClr val="6B7280"/>
+                </a:solidFill>
+                <a:latin typeface="Calibri"/>
+              </a:rPr>
+              <a:t>Palomar College · CSCI 250 · Fall 2026</a:t>
+            </a:r>
+          </a:p>
+        </p:txBody>
+      </p:sp>
+      <p:sp>
+        <p:nvSpPr>
+          <p:cNvPr id="10" name="TextBox 9"/>
+          <p:cNvSpPr txBox="1"/>
+          <p:nvPr/>
+        </p:nvSpPr>
+        <p:spPr>
+          <a:xfrm>
+            <a:off x="11155680" y="6446520"/>
+            <a:ext cx="822960" cy="365760"/>
+          </a:xfrm>
+          <a:prstGeom prst="rect">
+            <a:avLst/>
+          </a:prstGeom>
+          <a:noFill/>
+        </p:spPr>
+        <p:txBody>
+          <a:bodyPr wrap="square">
+            <a:spAutoFit/>
+          </a:bodyPr>
+          <a:lstStyle/>
+          <a:p>
             <a:pPr algn="r"/>
             <a:r>
               <a:rPr sz="1000" b="0">
@@ -4117,7 +4065,7 @@
                 </a:solidFill>
                 <a:latin typeface="Calibri"/>
               </a:rPr>
-              <a:t>12/18</a:t>
+              <a:t>12/15</a:t>
             </a:r>
           </a:p>
         </p:txBody>
@@ -4266,21 +4214,162 @@
                 </a:solidFill>
                 <a:latin typeface="Calibri"/>
               </a:rPr>
-              <a:t>Cite Sources &amp; Know Your Limits</a:t>
-            </a:r>
-          </a:p>
-        </p:txBody>
-      </p:sp>
-      <p:sp>
-        <p:nvSpPr>
-          <p:cNvPr id="5" name="TextBox 4"/>
+              <a:t>Score It With the Shared Helpers</a:t>
+            </a:r>
+          </a:p>
+        </p:txBody>
+      </p:sp>
+      <p:sp>
+        <p:nvSpPr>
+          <p:cNvPr id="5" name="Rectangle 4"/>
+          <p:cNvSpPr/>
+          <p:nvPr/>
+        </p:nvSpPr>
+        <p:spPr>
+          <a:xfrm>
+            <a:off x="548640" y="1325880"/>
+            <a:ext cx="11064240" cy="4480560"/>
+          </a:xfrm>
+          <a:prstGeom prst="rect">
+            <a:avLst/>
+          </a:prstGeom>
+          <a:solidFill>
+            <a:srgbClr val="1E1E1E"/>
+          </a:solidFill>
+          <a:ln>
+            <a:noFill/>
+          </a:ln>
+          <a:effectLst/>
+        </p:spPr>
+        <p:style>
+          <a:lnRef idx="1">
+            <a:schemeClr val="accent1"/>
+          </a:lnRef>
+          <a:fillRef idx="3">
+            <a:schemeClr val="accent1"/>
+          </a:fillRef>
+          <a:effectRef idx="2">
+            <a:schemeClr val="accent1"/>
+          </a:effectRef>
+          <a:fontRef idx="minor">
+            <a:schemeClr val="lt1"/>
+          </a:fontRef>
+        </p:style>
+        <p:txBody>
+          <a:bodyPr rtlCol="0" anchor="ctr" wrap="square" lIns="182880" tIns="137160"/>
+          <a:lstStyle/>
+          <a:p>
+            <a:pPr algn="ctr"/>
+            <a:r>
+              <a:rPr sz="1500">
+                <a:solidFill>
+                  <a:srgbClr val="E6E6E6"/>
+                </a:solidFill>
+                <a:latin typeface="Consolas"/>
+              </a:rPr>
+              <a:t>from eval_utils import llm_judge, scorecard</a:t>
+            </a:r>
+          </a:p>
+          <a:p>
+            <a:r>
+              <a:rPr sz="1500">
+                <a:solidFill>
+                  <a:srgbClr val="E6E6E6"/>
+                </a:solidFill>
+                <a:latin typeface="Consolas"/>
+              </a:rPr>
+              <a:t> </a:t>
+            </a:r>
+          </a:p>
+          <a:p>
+            <a:r>
+              <a:rPr sz="1500">
+                <a:solidFill>
+                  <a:srgbClr val="E6E6E6"/>
+                </a:solidFill>
+                <a:latin typeface="Consolas"/>
+              </a:rPr>
+              <a:t>rubric = ('Rate 1-5 how RELEVANT the answer is. '</a:t>
+            </a:r>
+          </a:p>
+          <a:p>
+            <a:r>
+              <a:rPr sz="1500">
+                <a:solidFill>
+                  <a:srgbClr val="E6E6E6"/>
+                </a:solidFill>
+                <a:latin typeface="Consolas"/>
+              </a:rPr>
+              <a:t>          'Return ONLY JSON: {"score": &lt;int&gt;, "reason": ""}.')</a:t>
+            </a:r>
+          </a:p>
+          <a:p>
+            <a:r>
+              <a:rPr sz="1500">
+                <a:solidFill>
+                  <a:srgbClr val="E6E6E6"/>
+                </a:solidFill>
+                <a:latin typeface="Consolas"/>
+              </a:rPr>
+              <a:t>llm_judge(question, answer, rubric)</a:t>
+            </a:r>
+          </a:p>
+          <a:p>
+            <a:r>
+              <a:rPr sz="1500">
+                <a:solidFill>
+                  <a:srgbClr val="E6E6E6"/>
+                </a:solidFill>
+                <a:latin typeface="Consolas"/>
+              </a:rPr>
+              <a:t>#   -&gt; {'score': 4, 'reason': '...', 'judge': 'gemini'}</a:t>
+            </a:r>
+          </a:p>
+          <a:p>
+            <a:r>
+              <a:rPr sz="1500">
+                <a:solidFill>
+                  <a:srgbClr val="E6E6E6"/>
+                </a:solidFill>
+                <a:latin typeface="Consolas"/>
+              </a:rPr>
+              <a:t> </a:t>
+            </a:r>
+          </a:p>
+          <a:p>
+            <a:r>
+              <a:rPr sz="1500">
+                <a:solidFill>
+                  <a:srgbClr val="E6E6E6"/>
+                </a:solidFill>
+                <a:latin typeface="Consolas"/>
+              </a:rPr>
+              <a:t>rows = [{'q': q, **rag_triad(rag(q))} for q in EVAL_QS]</a:t>
+            </a:r>
+          </a:p>
+          <a:p>
+            <a:r>
+              <a:rPr sz="1500">
+                <a:solidFill>
+                  <a:srgbClr val="E6E6E6"/>
+                </a:solidFill>
+                <a:latin typeface="Consolas"/>
+              </a:rPr>
+              <a:t>scorecard(rows)   # per-question + average triad</a:t>
+            </a:r>
+          </a:p>
+        </p:txBody>
+      </p:sp>
+      <p:sp>
+        <p:nvSpPr>
+          <p:cNvPr id="6" name="TextBox 5"/>
           <p:cNvSpPr txBox="1"/>
           <p:nvPr/>
         </p:nvSpPr>
         <p:spPr>
           <a:xfrm>
-            <a:off x="731520" y="1371600"/>
-            <a:ext cx="10698480" cy="4754880"/>
+            <a:off x="548640" y="5897880"/>
+            <a:ext cx="10515600" cy="457200"/>
           </a:xfrm>
           <a:prstGeom prst="rect">
             <a:avLst/>
@@ -4293,90 +4382,22 @@
           </a:bodyPr>
           <a:lstStyle/>
           <a:p>
-            <a:pPr>
-              <a:spcAft>
-                <a:spcPts val="800"/>
-              </a:spcAft>
-            </a:pPr>
-            <a:r>
-              <a:rPr sz="2000">
-                <a:solidFill>
-                  <a:srgbClr val="1A1A1A"/>
-                </a:solidFill>
-                <a:latin typeface="Calibri"/>
-              </a:rPr>
-              <a:t>• Show WHICH chunks/documents were used</a:t>
-            </a:r>
-          </a:p>
-          <a:p>
-            <a:pPr>
-              <a:spcAft>
-                <a:spcPts val="800"/>
-              </a:spcAft>
-            </a:pPr>
-            <a:r>
-              <a:rPr sz="2000">
-                <a:solidFill>
-                  <a:srgbClr val="1A1A1A"/>
-                </a:solidFill>
-                <a:latin typeface="Calibri"/>
-              </a:rPr>
-              <a:t>• Answer "I don't know" when retrieval is empty or weak</a:t>
-            </a:r>
-          </a:p>
-          <a:p>
-            <a:pPr>
-              <a:spcAft>
-                <a:spcPts val="800"/>
-              </a:spcAft>
-            </a:pPr>
-            <a:r>
-              <a:rPr sz="2000">
-                <a:solidFill>
-                  <a:srgbClr val="1A1A1A"/>
-                </a:solidFill>
-                <a:latin typeface="Calibri"/>
-              </a:rPr>
-              <a:t>• Never invent a citation that wasn't retrieved</a:t>
-            </a:r>
-          </a:p>
-          <a:p>
-            <a:pPr lvl="1">
-              <a:spcAft>
-                <a:spcPts val="800"/>
-              </a:spcAft>
-            </a:pPr>
-            <a:r>
-              <a:rPr sz="1800">
+            <a:pPr algn="l"/>
+            <a:r>
+              <a:rPr sz="1400" b="0">
                 <a:solidFill>
                   <a:srgbClr val="6B7280"/>
                 </a:solidFill>
                 <a:latin typeface="Calibri"/>
               </a:rPr>
-              <a:t>– Most RAG bugs are in RETRIEVAL, not generation</a:t>
-            </a:r>
-          </a:p>
-          <a:p>
-            <a:pPr lvl="1">
-              <a:spcAft>
-                <a:spcPts val="800"/>
-              </a:spcAft>
-            </a:pPr>
-            <a:r>
-              <a:rPr sz="1800">
-                <a:solidFill>
-                  <a:srgbClr val="6B7280"/>
-                </a:solidFill>
-                <a:latin typeface="Calibri"/>
-              </a:rPr>
-              <a:t>– Print the retrieved chunks FIRST when debugging</a:t>
-            </a:r>
-          </a:p>
-        </p:txBody>
-      </p:sp>
-      <p:sp>
-        <p:nvSpPr>
-          <p:cNvPr id="6" name="TextBox 5"/>
+              <a:t>Gemini Flash / Claude Haiku judge; heuristic fallback with no key — never crashes</a:t>
+            </a:r>
+          </a:p>
+        </p:txBody>
+      </p:sp>
+      <p:sp>
+        <p:nvSpPr>
+          <p:cNvPr id="7" name="TextBox 6"/>
           <p:cNvSpPr txBox="1"/>
           <p:nvPr/>
         </p:nvSpPr>
@@ -4411,7 +4432,7 @@
       </p:sp>
       <p:sp>
         <p:nvSpPr>
-          <p:cNvPr id="7" name="TextBox 6"/>
+          <p:cNvPr id="8" name="TextBox 7"/>
           <p:cNvSpPr txBox="1"/>
           <p:nvPr/>
         </p:nvSpPr>
@@ -4439,7 +4460,7 @@
                 </a:solidFill>
                 <a:latin typeface="Calibri"/>
               </a:rPr>
-              <a:t>13/18</a:t>
+              <a:t>13/15</a:t>
             </a:r>
           </a:p>
         </p:txBody>
@@ -4453,67 +4474,6 @@
 </file>
 
 <file path=ppt/slides/slide14.xml><?xml version="1.0" encoding="utf-8"?>
-<p:sld xmlns:a="http://schemas.openxmlformats.org/drawingml/2006/main" xmlns:p="http://schemas.openxmlformats.org/presentationml/2006/main" xmlns:r="http://schemas.openxmlformats.org/officeDocument/2006/relationships">
-  <p:cSld>
-    <p:bg>
-      <p:bgPr>
-        <a:solidFill>
-          <a:srgbClr val="128C8C"/>
-        </a:solidFill>
-        <a:effectLst/>
-      </p:bgPr>
-    </p:bg>
-    <p:spTree>
-      <p:nvGrpSpPr>
-        <p:cNvPr id="1" name=""/>
-        <p:cNvGrpSpPr/>
-        <p:nvPr/>
-      </p:nvGrpSpPr>
-      <p:grpSpPr/>
-      <p:sp>
-        <p:nvSpPr>
-          <p:cNvPr id="2" name="TextBox 1"/>
-          <p:cNvSpPr txBox="1"/>
-          <p:nvPr/>
-        </p:nvSpPr>
-        <p:spPr>
-          <a:xfrm>
-            <a:off x="822960" y="2743200"/>
-            <a:ext cx="10515600" cy="1371600"/>
-          </a:xfrm>
-          <a:prstGeom prst="rect">
-            <a:avLst/>
-          </a:prstGeom>
-          <a:noFill/>
-        </p:spPr>
-        <p:txBody>
-          <a:bodyPr wrap="square" anchor="ctr">
-            <a:spAutoFit/>
-          </a:bodyPr>
-          <a:lstStyle/>
-          <a:p>
-            <a:pPr algn="l"/>
-            <a:r>
-              <a:rPr sz="3600" b="1">
-                <a:solidFill>
-                  <a:srgbClr val="FFFFFF"/>
-                </a:solidFill>
-                <a:latin typeface="Calibri"/>
-              </a:rPr>
-              <a:t>Evaluate RAG — Measure, Don't Guess</a:t>
-            </a:r>
-          </a:p>
-        </p:txBody>
-      </p:sp>
-    </p:spTree>
-  </p:cSld>
-  <p:clrMapOvr>
-    <a:masterClrMapping/>
-  </p:clrMapOvr>
-</p:sld>
-</file>
-
-<file path=ppt/slides/slide15.xml><?xml version="1.0" encoding="utf-8"?>
 <p:sld xmlns:a="http://schemas.openxmlformats.org/drawingml/2006/main" xmlns:p="http://schemas.openxmlformats.org/presentationml/2006/main" xmlns:r="http://schemas.openxmlformats.org/officeDocument/2006/relationships">
   <p:cSld>
     <p:bg>
@@ -4649,7 +4609,7 @@
                 </a:solidFill>
                 <a:latin typeface="Calibri"/>
               </a:rPr>
-              <a:t>The RAG Triad</a:t>
+              <a:t>Baseline → Change One Thing → Re-measure</a:t>
             </a:r>
           </a:p>
         </p:txBody>
@@ -4662,43 +4622,8 @@
         </p:nvSpPr>
         <p:spPr>
           <a:xfrm>
-            <a:off x="731520" y="1280160"/>
-            <a:ext cx="5120640" cy="548640"/>
-          </a:xfrm>
-          <a:prstGeom prst="rect">
-            <a:avLst/>
-          </a:prstGeom>
-          <a:noFill/>
-        </p:spPr>
-        <p:txBody>
-          <a:bodyPr wrap="square">
-            <a:spAutoFit/>
-          </a:bodyPr>
-          <a:lstStyle/>
-          <a:p>
-            <a:pPr algn="l"/>
-            <a:r>
-              <a:rPr sz="2000" b="1">
-                <a:solidFill>
-                  <a:srgbClr val="128C8C"/>
-                </a:solidFill>
-                <a:latin typeface="Calibri"/>
-              </a:rPr>
-              <a:t>Three links to check</a:t>
-            </a:r>
-          </a:p>
-        </p:txBody>
-      </p:sp>
-      <p:sp>
-        <p:nvSpPr>
-          <p:cNvPr id="6" name="TextBox 5"/>
-          <p:cNvSpPr txBox="1"/>
-          <p:nvPr/>
-        </p:nvSpPr>
-        <p:spPr>
-          <a:xfrm>
-            <a:off x="731520" y="1828800"/>
-            <a:ext cx="5120640" cy="4206240"/>
+            <a:off x="731520" y="1371600"/>
+            <a:ext cx="10698480" cy="4754880"/>
           </a:xfrm>
           <a:prstGeom prst="rect">
             <a:avLst/>
@@ -4717,13 +4642,13 @@
               </a:spcAft>
             </a:pPr>
             <a:r>
-              <a:rPr sz="1800">
+              <a:rPr sz="2000">
                 <a:solidFill>
                   <a:srgbClr val="1A1A1A"/>
                 </a:solidFill>
                 <a:latin typeface="Calibri"/>
               </a:rPr>
-              <a:t>• Context Relevance: right chunks?</a:t>
+              <a:t>• Pin a FIXED set of eval questions (a test set)</a:t>
             </a:r>
           </a:p>
           <a:p>
@@ -4733,13 +4658,13 @@
               </a:spcAft>
             </a:pPr>
             <a:r>
-              <a:rPr sz="1800">
+              <a:rPr sz="2000">
                 <a:solidFill>
                   <a:srgbClr val="1A1A1A"/>
                 </a:solidFill>
                 <a:latin typeface="Calibri"/>
               </a:rPr>
-              <a:t>• Groundedness: answer supported?</a:t>
+              <a:t>• Score a baseline config; print the scorecard</a:t>
             </a:r>
           </a:p>
           <a:p>
@@ -4749,13 +4674,45 @@
               </a:spcAft>
             </a:pPr>
             <a:r>
+              <a:rPr sz="2000">
+                <a:solidFill>
+                  <a:srgbClr val="1A1A1A"/>
+                </a:solidFill>
+                <a:latin typeface="Calibri"/>
+              </a:rPr>
+              <a:t>• Change one thing (chunk_size 120 -&gt; 300)</a:t>
+            </a:r>
+          </a:p>
+          <a:p>
+            <a:pPr lvl="1">
+              <a:spcAft>
+                <a:spcPts val="800"/>
+              </a:spcAft>
+            </a:pPr>
+            <a:r>
               <a:rPr sz="1800">
                 <a:solidFill>
-                  <a:srgbClr val="1A1A1A"/>
-                </a:solidFill>
-                <a:latin typeface="Calibri"/>
-              </a:rPr>
-              <a:t>• Answer Relevance: on topic?</a:t>
+                  <a:srgbClr val="6B7280"/>
+                </a:solidFill>
+                <a:latin typeface="Calibri"/>
+              </a:rPr>
+              <a:t>– Re-measure on the SAME questions — compare averages</a:t>
+            </a:r>
+          </a:p>
+          <a:p>
+            <a:pPr lvl="1">
+              <a:spcAft>
+                <a:spcPts val="800"/>
+              </a:spcAft>
+            </a:pPr>
+            <a:r>
+              <a:rPr sz="1800">
+                <a:solidFill>
+                  <a:srgbClr val="6B7280"/>
+                </a:solidFill>
+                <a:latin typeface="Calibri"/>
+              </a:rPr>
+              <a:t>– Higher triad wins; ties go to the simpler/cheaper config</a:t>
             </a:r>
           </a:p>
           <a:p>
@@ -4765,27 +4722,27 @@
               </a:spcAft>
             </a:pPr>
             <a:r>
-              <a:rPr sz="1800">
+              <a:rPr sz="2000">
                 <a:solidFill>
                   <a:srgbClr val="1A1A1A"/>
                 </a:solidFill>
                 <a:latin typeface="Calibri"/>
               </a:rPr>
-              <a:t>• Each scored 1-5 by an LLM judge</a:t>
-            </a:r>
-          </a:p>
-        </p:txBody>
-      </p:sp>
-      <p:sp>
-        <p:nvSpPr>
-          <p:cNvPr id="7" name="TextBox 6"/>
+              <a:t>• This is how you improve RAG without fooling yourself</a:t>
+            </a:r>
+          </a:p>
+        </p:txBody>
+      </p:sp>
+      <p:sp>
+        <p:nvSpPr>
+          <p:cNvPr id="6" name="TextBox 5"/>
           <p:cNvSpPr txBox="1"/>
           <p:nvPr/>
         </p:nvSpPr>
         <p:spPr>
           <a:xfrm>
-            <a:off x="6309360" y="1280160"/>
-            <a:ext cx="5120640" cy="548640"/>
+            <a:off x="365760" y="6446520"/>
+            <a:ext cx="8229600" cy="365760"/>
           </a:xfrm>
           <a:prstGeom prst="rect">
             <a:avLst/>
@@ -4800,27 +4757,27 @@
           <a:p>
             <a:pPr algn="l"/>
             <a:r>
-              <a:rPr sz="2000" b="1">
-                <a:solidFill>
-                  <a:srgbClr val="128C8C"/>
-                </a:solidFill>
-                <a:latin typeface="Calibri"/>
-              </a:rPr>
-              <a:t>Why it's powerful</a:t>
-            </a:r>
-          </a:p>
-        </p:txBody>
-      </p:sp>
-      <p:sp>
-        <p:nvSpPr>
-          <p:cNvPr id="8" name="TextBox 7"/>
+              <a:rPr sz="1000" b="0">
+                <a:solidFill>
+                  <a:srgbClr val="6B7280"/>
+                </a:solidFill>
+                <a:latin typeface="Calibri"/>
+              </a:rPr>
+              <a:t>Palomar College · CSCI 250 · Fall 2026</a:t>
+            </a:r>
+          </a:p>
+        </p:txBody>
+      </p:sp>
+      <p:sp>
+        <p:nvSpPr>
+          <p:cNvPr id="7" name="TextBox 6"/>
           <p:cNvSpPr txBox="1"/>
           <p:nvPr/>
         </p:nvSpPr>
         <p:spPr>
           <a:xfrm>
-            <a:off x="6309360" y="1828800"/>
-            <a:ext cx="5120640" cy="4206240"/>
+            <a:off x="11155680" y="6446520"/>
+            <a:ext cx="822960" cy="365760"/>
           </a:xfrm>
           <a:prstGeom prst="rect">
             <a:avLst/>
@@ -4833,94 +4790,7 @@
           </a:bodyPr>
           <a:lstStyle/>
           <a:p>
-            <a:pPr>
-              <a:spcAft>
-                <a:spcPts val="800"/>
-              </a:spcAft>
-            </a:pPr>
-            <a:r>
-              <a:rPr sz="1800">
-                <a:solidFill>
-                  <a:srgbClr val="1A1A1A"/>
-                </a:solidFill>
-                <a:latin typeface="Calibri"/>
-              </a:rPr>
-              <a:t>• Localizes the failure</a:t>
-            </a:r>
-          </a:p>
-          <a:p>
-            <a:pPr>
-              <a:spcAft>
-                <a:spcPts val="800"/>
-              </a:spcAft>
-            </a:pPr>
-            <a:r>
-              <a:rPr sz="1800">
-                <a:solidFill>
-                  <a:srgbClr val="1A1A1A"/>
-                </a:solidFill>
-                <a:latin typeface="Calibri"/>
-              </a:rPr>
-              <a:t>• Low context -&gt; fix retrieval</a:t>
-            </a:r>
-          </a:p>
-          <a:p>
-            <a:pPr>
-              <a:spcAft>
-                <a:spcPts val="800"/>
-              </a:spcAft>
-            </a:pPr>
-            <a:r>
-              <a:rPr sz="1800">
-                <a:solidFill>
-                  <a:srgbClr val="1A1A1A"/>
-                </a:solidFill>
-                <a:latin typeface="Calibri"/>
-              </a:rPr>
-              <a:t>• Low groundedness -&gt; fix prompt</a:t>
-            </a:r>
-          </a:p>
-          <a:p>
-            <a:pPr>
-              <a:spcAft>
-                <a:spcPts val="800"/>
-              </a:spcAft>
-            </a:pPr>
-            <a:r>
-              <a:rPr sz="1800">
-                <a:solidFill>
-                  <a:srgbClr val="1A1A1A"/>
-                </a:solidFill>
-                <a:latin typeface="Calibri"/>
-              </a:rPr>
-              <a:t>• Low answer rel. -&gt; fix framing</a:t>
-            </a:r>
-          </a:p>
-        </p:txBody>
-      </p:sp>
-      <p:sp>
-        <p:nvSpPr>
-          <p:cNvPr id="9" name="TextBox 8"/>
-          <p:cNvSpPr txBox="1"/>
-          <p:nvPr/>
-        </p:nvSpPr>
-        <p:spPr>
-          <a:xfrm>
-            <a:off x="365760" y="6446520"/>
-            <a:ext cx="8229600" cy="365760"/>
-          </a:xfrm>
-          <a:prstGeom prst="rect">
-            <a:avLst/>
-          </a:prstGeom>
-          <a:noFill/>
-        </p:spPr>
-        <p:txBody>
-          <a:bodyPr wrap="square">
-            <a:spAutoFit/>
-          </a:bodyPr>
-          <a:lstStyle/>
-          <a:p>
-            <a:pPr algn="l"/>
+            <a:pPr algn="r"/>
             <a:r>
               <a:rPr sz="1000" b="0">
                 <a:solidFill>
@@ -4928,42 +4798,7 @@
                 </a:solidFill>
                 <a:latin typeface="Calibri"/>
               </a:rPr>
-              <a:t>Palomar College · CSCI 250 · Fall 2026</a:t>
-            </a:r>
-          </a:p>
-        </p:txBody>
-      </p:sp>
-      <p:sp>
-        <p:nvSpPr>
-          <p:cNvPr id="10" name="TextBox 9"/>
-          <p:cNvSpPr txBox="1"/>
-          <p:nvPr/>
-        </p:nvSpPr>
-        <p:spPr>
-          <a:xfrm>
-            <a:off x="11155680" y="6446520"/>
-            <a:ext cx="822960" cy="365760"/>
-          </a:xfrm>
-          <a:prstGeom prst="rect">
-            <a:avLst/>
-          </a:prstGeom>
-          <a:noFill/>
-        </p:spPr>
-        <p:txBody>
-          <a:bodyPr wrap="square">
-            <a:spAutoFit/>
-          </a:bodyPr>
-          <a:lstStyle/>
-          <a:p>
-            <a:pPr algn="r"/>
-            <a:r>
-              <a:rPr sz="1000" b="0">
-                <a:solidFill>
-                  <a:srgbClr val="6B7280"/>
-                </a:solidFill>
-                <a:latin typeface="Calibri"/>
-              </a:rPr>
-              <a:t>15/18</a:t>
+              <a:t>14/15</a:t>
             </a:r>
           </a:p>
         </p:txBody>
@@ -4976,740 +4811,7 @@
 </p:sld>
 </file>
 
-<file path=ppt/slides/slide16.xml><?xml version="1.0" encoding="utf-8"?>
-<p:sld xmlns:a="http://schemas.openxmlformats.org/drawingml/2006/main" xmlns:p="http://schemas.openxmlformats.org/presentationml/2006/main" xmlns:r="http://schemas.openxmlformats.org/officeDocument/2006/relationships">
-  <p:cSld>
-    <p:bg>
-      <p:bgPr>
-        <a:solidFill>
-          <a:srgbClr val="FFFFFF"/>
-        </a:solidFill>
-        <a:effectLst/>
-      </p:bgPr>
-    </p:bg>
-    <p:spTree>
-      <p:nvGrpSpPr>
-        <p:cNvPr id="1" name=""/>
-        <p:cNvGrpSpPr/>
-        <p:nvPr/>
-      </p:nvGrpSpPr>
-      <p:grpSpPr/>
-      <p:sp>
-        <p:nvSpPr>
-          <p:cNvPr id="2" name="Rectangle 1"/>
-          <p:cNvSpPr/>
-          <p:nvPr/>
-        </p:nvSpPr>
-        <p:spPr>
-          <a:xfrm>
-            <a:off x="0" y="0"/>
-            <a:ext cx="12191695" cy="1051560"/>
-          </a:xfrm>
-          <a:prstGeom prst="rect">
-            <a:avLst/>
-          </a:prstGeom>
-          <a:solidFill>
-            <a:srgbClr val="0B1F3A"/>
-          </a:solidFill>
-          <a:ln>
-            <a:noFill/>
-          </a:ln>
-          <a:effectLst/>
-        </p:spPr>
-        <p:style>
-          <a:lnRef idx="1">
-            <a:schemeClr val="accent1"/>
-          </a:lnRef>
-          <a:fillRef idx="3">
-            <a:schemeClr val="accent1"/>
-          </a:fillRef>
-          <a:effectRef idx="2">
-            <a:schemeClr val="accent1"/>
-          </a:effectRef>
-          <a:fontRef idx="minor">
-            <a:schemeClr val="lt1"/>
-          </a:fontRef>
-        </p:style>
-        <p:txBody>
-          <a:bodyPr rtlCol="0" anchor="ctr"/>
-          <a:lstStyle/>
-          <a:p>
-            <a:pPr algn="ctr"/>
-          </a:p>
-        </p:txBody>
-      </p:sp>
-      <p:sp>
-        <p:nvSpPr>
-          <p:cNvPr id="3" name="Rectangle 2"/>
-          <p:cNvSpPr/>
-          <p:nvPr/>
-        </p:nvSpPr>
-        <p:spPr>
-          <a:xfrm>
-            <a:off x="0" y="1051560"/>
-            <a:ext cx="12191695" cy="54864"/>
-          </a:xfrm>
-          <a:prstGeom prst="rect">
-            <a:avLst/>
-          </a:prstGeom>
-          <a:solidFill>
-            <a:srgbClr val="128C8C"/>
-          </a:solidFill>
-          <a:ln>
-            <a:noFill/>
-          </a:ln>
-          <a:effectLst/>
-        </p:spPr>
-        <p:style>
-          <a:lnRef idx="1">
-            <a:schemeClr val="accent1"/>
-          </a:lnRef>
-          <a:fillRef idx="3">
-            <a:schemeClr val="accent1"/>
-          </a:fillRef>
-          <a:effectRef idx="2">
-            <a:schemeClr val="accent1"/>
-          </a:effectRef>
-          <a:fontRef idx="minor">
-            <a:schemeClr val="lt1"/>
-          </a:fontRef>
-        </p:style>
-        <p:txBody>
-          <a:bodyPr rtlCol="0" anchor="ctr"/>
-          <a:lstStyle/>
-          <a:p>
-            <a:pPr algn="ctr"/>
-          </a:p>
-        </p:txBody>
-      </p:sp>
-      <p:sp>
-        <p:nvSpPr>
-          <p:cNvPr id="4" name="TextBox 3"/>
-          <p:cNvSpPr txBox="1"/>
-          <p:nvPr/>
-        </p:nvSpPr>
-        <p:spPr>
-          <a:xfrm>
-            <a:off x="548640" y="201168"/>
-            <a:ext cx="11064240" cy="731520"/>
-          </a:xfrm>
-          <a:prstGeom prst="rect">
-            <a:avLst/>
-          </a:prstGeom>
-          <a:noFill/>
-        </p:spPr>
-        <p:txBody>
-          <a:bodyPr wrap="square" anchor="ctr">
-            <a:spAutoFit/>
-          </a:bodyPr>
-          <a:lstStyle/>
-          <a:p>
-            <a:pPr algn="l"/>
-            <a:r>
-              <a:rPr sz="2800" b="1">
-                <a:solidFill>
-                  <a:srgbClr val="FFFFFF"/>
-                </a:solidFill>
-                <a:latin typeface="Calibri"/>
-              </a:rPr>
-              <a:t>Score It With the Shared Helpers</a:t>
-            </a:r>
-          </a:p>
-        </p:txBody>
-      </p:sp>
-      <p:sp>
-        <p:nvSpPr>
-          <p:cNvPr id="5" name="Rectangle 4"/>
-          <p:cNvSpPr/>
-          <p:nvPr/>
-        </p:nvSpPr>
-        <p:spPr>
-          <a:xfrm>
-            <a:off x="548640" y="1325880"/>
-            <a:ext cx="11064240" cy="4480560"/>
-          </a:xfrm>
-          <a:prstGeom prst="rect">
-            <a:avLst/>
-          </a:prstGeom>
-          <a:solidFill>
-            <a:srgbClr val="1E1E1E"/>
-          </a:solidFill>
-          <a:ln>
-            <a:noFill/>
-          </a:ln>
-          <a:effectLst/>
-        </p:spPr>
-        <p:style>
-          <a:lnRef idx="1">
-            <a:schemeClr val="accent1"/>
-          </a:lnRef>
-          <a:fillRef idx="3">
-            <a:schemeClr val="accent1"/>
-          </a:fillRef>
-          <a:effectRef idx="2">
-            <a:schemeClr val="accent1"/>
-          </a:effectRef>
-          <a:fontRef idx="minor">
-            <a:schemeClr val="lt1"/>
-          </a:fontRef>
-        </p:style>
-        <p:txBody>
-          <a:bodyPr rtlCol="0" anchor="ctr" wrap="square" lIns="182880" tIns="137160"/>
-          <a:lstStyle/>
-          <a:p>
-            <a:pPr algn="ctr"/>
-            <a:r>
-              <a:rPr sz="1500">
-                <a:solidFill>
-                  <a:srgbClr val="E6E6E6"/>
-                </a:solidFill>
-                <a:latin typeface="Consolas"/>
-              </a:rPr>
-              <a:t>from eval_utils import llm_judge, scorecard</a:t>
-            </a:r>
-          </a:p>
-          <a:p>
-            <a:r>
-              <a:rPr sz="1500">
-                <a:solidFill>
-                  <a:srgbClr val="E6E6E6"/>
-                </a:solidFill>
-                <a:latin typeface="Consolas"/>
-              </a:rPr>
-              <a:t> </a:t>
-            </a:r>
-          </a:p>
-          <a:p>
-            <a:r>
-              <a:rPr sz="1500">
-                <a:solidFill>
-                  <a:srgbClr val="E6E6E6"/>
-                </a:solidFill>
-                <a:latin typeface="Consolas"/>
-              </a:rPr>
-              <a:t>rubric = ('Rate 1-5 how RELEVANT the answer is. '</a:t>
-            </a:r>
-          </a:p>
-          <a:p>
-            <a:r>
-              <a:rPr sz="1500">
-                <a:solidFill>
-                  <a:srgbClr val="E6E6E6"/>
-                </a:solidFill>
-                <a:latin typeface="Consolas"/>
-              </a:rPr>
-              <a:t>          'Return ONLY JSON: {"score": &lt;int&gt;, "reason": ""}.')</a:t>
-            </a:r>
-          </a:p>
-          <a:p>
-            <a:r>
-              <a:rPr sz="1500">
-                <a:solidFill>
-                  <a:srgbClr val="E6E6E6"/>
-                </a:solidFill>
-                <a:latin typeface="Consolas"/>
-              </a:rPr>
-              <a:t>llm_judge(question, answer, rubric)</a:t>
-            </a:r>
-          </a:p>
-          <a:p>
-            <a:r>
-              <a:rPr sz="1500">
-                <a:solidFill>
-                  <a:srgbClr val="E6E6E6"/>
-                </a:solidFill>
-                <a:latin typeface="Consolas"/>
-              </a:rPr>
-              <a:t>#   -&gt; {'score': 4, 'reason': '...', 'judge': 'gemini'}</a:t>
-            </a:r>
-          </a:p>
-          <a:p>
-            <a:r>
-              <a:rPr sz="1500">
-                <a:solidFill>
-                  <a:srgbClr val="E6E6E6"/>
-                </a:solidFill>
-                <a:latin typeface="Consolas"/>
-              </a:rPr>
-              <a:t> </a:t>
-            </a:r>
-          </a:p>
-          <a:p>
-            <a:r>
-              <a:rPr sz="1500">
-                <a:solidFill>
-                  <a:srgbClr val="E6E6E6"/>
-                </a:solidFill>
-                <a:latin typeface="Consolas"/>
-              </a:rPr>
-              <a:t>rows = [{'q': q, **rag_triad(rag(q))} for q in EVAL_QS]</a:t>
-            </a:r>
-          </a:p>
-          <a:p>
-            <a:r>
-              <a:rPr sz="1500">
-                <a:solidFill>
-                  <a:srgbClr val="E6E6E6"/>
-                </a:solidFill>
-                <a:latin typeface="Consolas"/>
-              </a:rPr>
-              <a:t>scorecard(rows)   # per-question + average triad</a:t>
-            </a:r>
-          </a:p>
-        </p:txBody>
-      </p:sp>
-      <p:sp>
-        <p:nvSpPr>
-          <p:cNvPr id="6" name="TextBox 5"/>
-          <p:cNvSpPr txBox="1"/>
-          <p:nvPr/>
-        </p:nvSpPr>
-        <p:spPr>
-          <a:xfrm>
-            <a:off x="548640" y="5897880"/>
-            <a:ext cx="10515600" cy="457200"/>
-          </a:xfrm>
-          <a:prstGeom prst="rect">
-            <a:avLst/>
-          </a:prstGeom>
-          <a:noFill/>
-        </p:spPr>
-        <p:txBody>
-          <a:bodyPr wrap="square">
-            <a:spAutoFit/>
-          </a:bodyPr>
-          <a:lstStyle/>
-          <a:p>
-            <a:pPr algn="l"/>
-            <a:r>
-              <a:rPr sz="1400" b="0">
-                <a:solidFill>
-                  <a:srgbClr val="6B7280"/>
-                </a:solidFill>
-                <a:latin typeface="Calibri"/>
-              </a:rPr>
-              <a:t>Gemini Flash / Claude Haiku judge; heuristic fallback with no key — never crashes</a:t>
-            </a:r>
-          </a:p>
-        </p:txBody>
-      </p:sp>
-      <p:sp>
-        <p:nvSpPr>
-          <p:cNvPr id="7" name="TextBox 6"/>
-          <p:cNvSpPr txBox="1"/>
-          <p:nvPr/>
-        </p:nvSpPr>
-        <p:spPr>
-          <a:xfrm>
-            <a:off x="365760" y="6446520"/>
-            <a:ext cx="8229600" cy="365760"/>
-          </a:xfrm>
-          <a:prstGeom prst="rect">
-            <a:avLst/>
-          </a:prstGeom>
-          <a:noFill/>
-        </p:spPr>
-        <p:txBody>
-          <a:bodyPr wrap="square">
-            <a:spAutoFit/>
-          </a:bodyPr>
-          <a:lstStyle/>
-          <a:p>
-            <a:pPr algn="l"/>
-            <a:r>
-              <a:rPr sz="1000" b="0">
-                <a:solidFill>
-                  <a:srgbClr val="6B7280"/>
-                </a:solidFill>
-                <a:latin typeface="Calibri"/>
-              </a:rPr>
-              <a:t>Palomar College · CSCI 250 · Fall 2026</a:t>
-            </a:r>
-          </a:p>
-        </p:txBody>
-      </p:sp>
-      <p:sp>
-        <p:nvSpPr>
-          <p:cNvPr id="8" name="TextBox 7"/>
-          <p:cNvSpPr txBox="1"/>
-          <p:nvPr/>
-        </p:nvSpPr>
-        <p:spPr>
-          <a:xfrm>
-            <a:off x="11155680" y="6446520"/>
-            <a:ext cx="822960" cy="365760"/>
-          </a:xfrm>
-          <a:prstGeom prst="rect">
-            <a:avLst/>
-          </a:prstGeom>
-          <a:noFill/>
-        </p:spPr>
-        <p:txBody>
-          <a:bodyPr wrap="square">
-            <a:spAutoFit/>
-          </a:bodyPr>
-          <a:lstStyle/>
-          <a:p>
-            <a:pPr algn="r"/>
-            <a:r>
-              <a:rPr sz="1000" b="0">
-                <a:solidFill>
-                  <a:srgbClr val="6B7280"/>
-                </a:solidFill>
-                <a:latin typeface="Calibri"/>
-              </a:rPr>
-              <a:t>16/18</a:t>
-            </a:r>
-          </a:p>
-        </p:txBody>
-      </p:sp>
-    </p:spTree>
-  </p:cSld>
-  <p:clrMapOvr>
-    <a:masterClrMapping/>
-  </p:clrMapOvr>
-</p:sld>
-</file>
-
-<file path=ppt/slides/slide17.xml><?xml version="1.0" encoding="utf-8"?>
-<p:sld xmlns:a="http://schemas.openxmlformats.org/drawingml/2006/main" xmlns:p="http://schemas.openxmlformats.org/presentationml/2006/main" xmlns:r="http://schemas.openxmlformats.org/officeDocument/2006/relationships">
-  <p:cSld>
-    <p:bg>
-      <p:bgPr>
-        <a:solidFill>
-          <a:srgbClr val="FFFFFF"/>
-        </a:solidFill>
-        <a:effectLst/>
-      </p:bgPr>
-    </p:bg>
-    <p:spTree>
-      <p:nvGrpSpPr>
-        <p:cNvPr id="1" name=""/>
-        <p:cNvGrpSpPr/>
-        <p:nvPr/>
-      </p:nvGrpSpPr>
-      <p:grpSpPr/>
-      <p:sp>
-        <p:nvSpPr>
-          <p:cNvPr id="2" name="Rectangle 1"/>
-          <p:cNvSpPr/>
-          <p:nvPr/>
-        </p:nvSpPr>
-        <p:spPr>
-          <a:xfrm>
-            <a:off x="0" y="0"/>
-            <a:ext cx="12191695" cy="1051560"/>
-          </a:xfrm>
-          <a:prstGeom prst="rect">
-            <a:avLst/>
-          </a:prstGeom>
-          <a:solidFill>
-            <a:srgbClr val="0B1F3A"/>
-          </a:solidFill>
-          <a:ln>
-            <a:noFill/>
-          </a:ln>
-          <a:effectLst/>
-        </p:spPr>
-        <p:style>
-          <a:lnRef idx="1">
-            <a:schemeClr val="accent1"/>
-          </a:lnRef>
-          <a:fillRef idx="3">
-            <a:schemeClr val="accent1"/>
-          </a:fillRef>
-          <a:effectRef idx="2">
-            <a:schemeClr val="accent1"/>
-          </a:effectRef>
-          <a:fontRef idx="minor">
-            <a:schemeClr val="lt1"/>
-          </a:fontRef>
-        </p:style>
-        <p:txBody>
-          <a:bodyPr rtlCol="0" anchor="ctr"/>
-          <a:lstStyle/>
-          <a:p>
-            <a:pPr algn="ctr"/>
-          </a:p>
-        </p:txBody>
-      </p:sp>
-      <p:sp>
-        <p:nvSpPr>
-          <p:cNvPr id="3" name="Rectangle 2"/>
-          <p:cNvSpPr/>
-          <p:nvPr/>
-        </p:nvSpPr>
-        <p:spPr>
-          <a:xfrm>
-            <a:off x="0" y="1051560"/>
-            <a:ext cx="12191695" cy="54864"/>
-          </a:xfrm>
-          <a:prstGeom prst="rect">
-            <a:avLst/>
-          </a:prstGeom>
-          <a:solidFill>
-            <a:srgbClr val="128C8C"/>
-          </a:solidFill>
-          <a:ln>
-            <a:noFill/>
-          </a:ln>
-          <a:effectLst/>
-        </p:spPr>
-        <p:style>
-          <a:lnRef idx="1">
-            <a:schemeClr val="accent1"/>
-          </a:lnRef>
-          <a:fillRef idx="3">
-            <a:schemeClr val="accent1"/>
-          </a:fillRef>
-          <a:effectRef idx="2">
-            <a:schemeClr val="accent1"/>
-          </a:effectRef>
-          <a:fontRef idx="minor">
-            <a:schemeClr val="lt1"/>
-          </a:fontRef>
-        </p:style>
-        <p:txBody>
-          <a:bodyPr rtlCol="0" anchor="ctr"/>
-          <a:lstStyle/>
-          <a:p>
-            <a:pPr algn="ctr"/>
-          </a:p>
-        </p:txBody>
-      </p:sp>
-      <p:sp>
-        <p:nvSpPr>
-          <p:cNvPr id="4" name="TextBox 3"/>
-          <p:cNvSpPr txBox="1"/>
-          <p:nvPr/>
-        </p:nvSpPr>
-        <p:spPr>
-          <a:xfrm>
-            <a:off x="548640" y="201168"/>
-            <a:ext cx="11064240" cy="731520"/>
-          </a:xfrm>
-          <a:prstGeom prst="rect">
-            <a:avLst/>
-          </a:prstGeom>
-          <a:noFill/>
-        </p:spPr>
-        <p:txBody>
-          <a:bodyPr wrap="square" anchor="ctr">
-            <a:spAutoFit/>
-          </a:bodyPr>
-          <a:lstStyle/>
-          <a:p>
-            <a:pPr algn="l"/>
-            <a:r>
-              <a:rPr sz="2800" b="1">
-                <a:solidFill>
-                  <a:srgbClr val="FFFFFF"/>
-                </a:solidFill>
-                <a:latin typeface="Calibri"/>
-              </a:rPr>
-              <a:t>Baseline → Change One Thing → Re-measure</a:t>
-            </a:r>
-          </a:p>
-        </p:txBody>
-      </p:sp>
-      <p:sp>
-        <p:nvSpPr>
-          <p:cNvPr id="5" name="TextBox 4"/>
-          <p:cNvSpPr txBox="1"/>
-          <p:nvPr/>
-        </p:nvSpPr>
-        <p:spPr>
-          <a:xfrm>
-            <a:off x="731520" y="1371600"/>
-            <a:ext cx="10698480" cy="4754880"/>
-          </a:xfrm>
-          <a:prstGeom prst="rect">
-            <a:avLst/>
-          </a:prstGeom>
-          <a:noFill/>
-        </p:spPr>
-        <p:txBody>
-          <a:bodyPr wrap="square">
-            <a:spAutoFit/>
-          </a:bodyPr>
-          <a:lstStyle/>
-          <a:p>
-            <a:pPr>
-              <a:spcAft>
-                <a:spcPts val="800"/>
-              </a:spcAft>
-            </a:pPr>
-            <a:r>
-              <a:rPr sz="2000">
-                <a:solidFill>
-                  <a:srgbClr val="1A1A1A"/>
-                </a:solidFill>
-                <a:latin typeface="Calibri"/>
-              </a:rPr>
-              <a:t>• Pin a FIXED set of eval questions (a test set)</a:t>
-            </a:r>
-          </a:p>
-          <a:p>
-            <a:pPr>
-              <a:spcAft>
-                <a:spcPts val="800"/>
-              </a:spcAft>
-            </a:pPr>
-            <a:r>
-              <a:rPr sz="2000">
-                <a:solidFill>
-                  <a:srgbClr val="1A1A1A"/>
-                </a:solidFill>
-                <a:latin typeface="Calibri"/>
-              </a:rPr>
-              <a:t>• Score a baseline config; print the scorecard</a:t>
-            </a:r>
-          </a:p>
-          <a:p>
-            <a:pPr>
-              <a:spcAft>
-                <a:spcPts val="800"/>
-              </a:spcAft>
-            </a:pPr>
-            <a:r>
-              <a:rPr sz="2000">
-                <a:solidFill>
-                  <a:srgbClr val="1A1A1A"/>
-                </a:solidFill>
-                <a:latin typeface="Calibri"/>
-              </a:rPr>
-              <a:t>• Change one thing (chunk_size 120 -&gt; 300)</a:t>
-            </a:r>
-          </a:p>
-          <a:p>
-            <a:pPr lvl="1">
-              <a:spcAft>
-                <a:spcPts val="800"/>
-              </a:spcAft>
-            </a:pPr>
-            <a:r>
-              <a:rPr sz="1800">
-                <a:solidFill>
-                  <a:srgbClr val="6B7280"/>
-                </a:solidFill>
-                <a:latin typeface="Calibri"/>
-              </a:rPr>
-              <a:t>– Re-measure on the SAME questions — compare averages</a:t>
-            </a:r>
-          </a:p>
-          <a:p>
-            <a:pPr lvl="1">
-              <a:spcAft>
-                <a:spcPts val="800"/>
-              </a:spcAft>
-            </a:pPr>
-            <a:r>
-              <a:rPr sz="1800">
-                <a:solidFill>
-                  <a:srgbClr val="6B7280"/>
-                </a:solidFill>
-                <a:latin typeface="Calibri"/>
-              </a:rPr>
-              <a:t>– Higher triad wins; ties go to the simpler/cheaper config</a:t>
-            </a:r>
-          </a:p>
-          <a:p>
-            <a:pPr>
-              <a:spcAft>
-                <a:spcPts val="800"/>
-              </a:spcAft>
-            </a:pPr>
-            <a:r>
-              <a:rPr sz="2000">
-                <a:solidFill>
-                  <a:srgbClr val="1A1A1A"/>
-                </a:solidFill>
-                <a:latin typeface="Calibri"/>
-              </a:rPr>
-              <a:t>• This is how you improve RAG without fooling yourself</a:t>
-            </a:r>
-          </a:p>
-        </p:txBody>
-      </p:sp>
-      <p:sp>
-        <p:nvSpPr>
-          <p:cNvPr id="6" name="TextBox 5"/>
-          <p:cNvSpPr txBox="1"/>
-          <p:nvPr/>
-        </p:nvSpPr>
-        <p:spPr>
-          <a:xfrm>
-            <a:off x="365760" y="6446520"/>
-            <a:ext cx="8229600" cy="365760"/>
-          </a:xfrm>
-          <a:prstGeom prst="rect">
-            <a:avLst/>
-          </a:prstGeom>
-          <a:noFill/>
-        </p:spPr>
-        <p:txBody>
-          <a:bodyPr wrap="square">
-            <a:spAutoFit/>
-          </a:bodyPr>
-          <a:lstStyle/>
-          <a:p>
-            <a:pPr algn="l"/>
-            <a:r>
-              <a:rPr sz="1000" b="0">
-                <a:solidFill>
-                  <a:srgbClr val="6B7280"/>
-                </a:solidFill>
-                <a:latin typeface="Calibri"/>
-              </a:rPr>
-              <a:t>Palomar College · CSCI 250 · Fall 2026</a:t>
-            </a:r>
-          </a:p>
-        </p:txBody>
-      </p:sp>
-      <p:sp>
-        <p:nvSpPr>
-          <p:cNvPr id="7" name="TextBox 6"/>
-          <p:cNvSpPr txBox="1"/>
-          <p:nvPr/>
-        </p:nvSpPr>
-        <p:spPr>
-          <a:xfrm>
-            <a:off x="11155680" y="6446520"/>
-            <a:ext cx="822960" cy="365760"/>
-          </a:xfrm>
-          <a:prstGeom prst="rect">
-            <a:avLst/>
-          </a:prstGeom>
-          <a:noFill/>
-        </p:spPr>
-        <p:txBody>
-          <a:bodyPr wrap="square">
-            <a:spAutoFit/>
-          </a:bodyPr>
-          <a:lstStyle/>
-          <a:p>
-            <a:pPr algn="r"/>
-            <a:r>
-              <a:rPr sz="1000" b="0">
-                <a:solidFill>
-                  <a:srgbClr val="6B7280"/>
-                </a:solidFill>
-                <a:latin typeface="Calibri"/>
-              </a:rPr>
-              <a:t>17/18</a:t>
-            </a:r>
-          </a:p>
-        </p:txBody>
-      </p:sp>
-    </p:spTree>
-  </p:cSld>
-  <p:clrMapOvr>
-    <a:masterClrMapping/>
-  </p:clrMapOvr>
-</p:sld>
-</file>
-
-<file path=ppt/slides/slide18.xml><?xml version="1.0" encoding="utf-8"?>
+<file path=ppt/slides/slide15.xml><?xml version="1.0" encoding="utf-8"?>
 <p:sld xmlns:a="http://schemas.openxmlformats.org/drawingml/2006/main" xmlns:p="http://schemas.openxmlformats.org/presentationml/2006/main" xmlns:r="http://schemas.openxmlformats.org/officeDocument/2006/relationships">
   <p:cSld>
     <p:bg>
@@ -5904,7 +5006,23 @@
                 </a:solidFill>
                 <a:latin typeface="Calibri"/>
               </a:rPr>
-              <a:t>✓ Save the pipeline — reuse it for your Final Project</a:t>
+              <a:t>✓ Build your M2 core engine; save the pipeline for the Capstone</a:t>
+            </a:r>
+          </a:p>
+          <a:p>
+            <a:pPr>
+              <a:spcAft>
+                <a:spcPts val="1200"/>
+              </a:spcAft>
+            </a:pPr>
+            <a:r>
+              <a:rPr sz="2200">
+                <a:solidFill>
+                  <a:srgbClr val="FFFFFF"/>
+                </a:solidFill>
+                <a:latin typeface="Calibri"/>
+              </a:rPr>
+              <a:t>✓ Submit Capstone M2 by Sunday 11:59 PM PST</a:t>
             </a:r>
           </a:p>
         </p:txBody>
@@ -5974,7 +5092,7 @@
                 </a:solidFill>
                 <a:latin typeface="Calibri"/>
               </a:rPr>
-              <a:t>18/18</a:t>
+              <a:t>15/15</a:t>
             </a:r>
           </a:p>
         </p:txBody>
@@ -6258,7 +5376,7 @@
                 </a:solidFill>
                 <a:latin typeface="Calibri"/>
               </a:rPr>
-              <a:t>– No graded assignment — build a reusable RAG pipeline</a:t>
+              <a:t>– Capstone Milestone M2 (core build) — your graded work this week</a:t>
             </a:r>
           </a:p>
         </p:txBody>
@@ -6328,7 +5446,7 @@
                 </a:solidFill>
                 <a:latin typeface="Calibri"/>
               </a:rPr>
-              <a:t>2/18</a:t>
+              <a:t>2/15</a:t>
             </a:r>
           </a:p>
         </p:txBody>
@@ -6727,7 +5845,7 @@
                 </a:solidFill>
                 <a:latin typeface="Calibri"/>
               </a:rPr>
-              <a:t>4/18</a:t>
+              <a:t>4/15</a:t>
             </a:r>
           </a:p>
         </p:txBody>
@@ -6746,7 +5864,7 @@
     <p:bg>
       <p:bgPr>
         <a:solidFill>
-          <a:srgbClr val="128C8C"/>
+          <a:srgbClr val="FFFFFF"/>
         </a:solidFill>
         <a:effectLst/>
       </p:bgPr>
@@ -6760,14 +5878,102 @@
       <p:grpSpPr/>
       <p:sp>
         <p:nvSpPr>
-          <p:cNvPr id="2" name="TextBox 1"/>
+          <p:cNvPr id="2" name="Rectangle 1"/>
+          <p:cNvSpPr/>
+          <p:nvPr/>
+        </p:nvSpPr>
+        <p:spPr>
+          <a:xfrm>
+            <a:off x="0" y="0"/>
+            <a:ext cx="12191695" cy="1051560"/>
+          </a:xfrm>
+          <a:prstGeom prst="rect">
+            <a:avLst/>
+          </a:prstGeom>
+          <a:solidFill>
+            <a:srgbClr val="0B1F3A"/>
+          </a:solidFill>
+          <a:ln>
+            <a:noFill/>
+          </a:ln>
+          <a:effectLst/>
+        </p:spPr>
+        <p:style>
+          <a:lnRef idx="1">
+            <a:schemeClr val="accent1"/>
+          </a:lnRef>
+          <a:fillRef idx="3">
+            <a:schemeClr val="accent1"/>
+          </a:fillRef>
+          <a:effectRef idx="2">
+            <a:schemeClr val="accent1"/>
+          </a:effectRef>
+          <a:fontRef idx="minor">
+            <a:schemeClr val="lt1"/>
+          </a:fontRef>
+        </p:style>
+        <p:txBody>
+          <a:bodyPr rtlCol="0" anchor="ctr"/>
+          <a:lstStyle/>
+          <a:p>
+            <a:pPr algn="ctr"/>
+          </a:p>
+        </p:txBody>
+      </p:sp>
+      <p:sp>
+        <p:nvSpPr>
+          <p:cNvPr id="3" name="Rectangle 2"/>
+          <p:cNvSpPr/>
+          <p:nvPr/>
+        </p:nvSpPr>
+        <p:spPr>
+          <a:xfrm>
+            <a:off x="0" y="1051560"/>
+            <a:ext cx="12191695" cy="54864"/>
+          </a:xfrm>
+          <a:prstGeom prst="rect">
+            <a:avLst/>
+          </a:prstGeom>
+          <a:solidFill>
+            <a:srgbClr val="128C8C"/>
+          </a:solidFill>
+          <a:ln>
+            <a:noFill/>
+          </a:ln>
+          <a:effectLst/>
+        </p:spPr>
+        <p:style>
+          <a:lnRef idx="1">
+            <a:schemeClr val="accent1"/>
+          </a:lnRef>
+          <a:fillRef idx="3">
+            <a:schemeClr val="accent1"/>
+          </a:fillRef>
+          <a:effectRef idx="2">
+            <a:schemeClr val="accent1"/>
+          </a:effectRef>
+          <a:fontRef idx="minor">
+            <a:schemeClr val="lt1"/>
+          </a:fontRef>
+        </p:style>
+        <p:txBody>
+          <a:bodyPr rtlCol="0" anchor="ctr"/>
+          <a:lstStyle/>
+          <a:p>
+            <a:pPr algn="ctr"/>
+          </a:p>
+        </p:txBody>
+      </p:sp>
+      <p:sp>
+        <p:nvSpPr>
+          <p:cNvPr id="4" name="TextBox 3"/>
           <p:cNvSpPr txBox="1"/>
           <p:nvPr/>
         </p:nvSpPr>
         <p:spPr>
           <a:xfrm>
-            <a:off x="822960" y="2743200"/>
-            <a:ext cx="10515600" cy="1371600"/>
+            <a:off x="548640" y="201168"/>
+            <a:ext cx="11064240" cy="731520"/>
           </a:xfrm>
           <a:prstGeom prst="rect">
             <a:avLst/>
@@ -6782,13 +5988,327 @@
           <a:p>
             <a:pPr algn="l"/>
             <a:r>
-              <a:rPr sz="3600" b="1">
+              <a:rPr sz="2800" b="1">
                 <a:solidFill>
                   <a:srgbClr val="FFFFFF"/>
                 </a:solidFill>
                 <a:latin typeface="Calibri"/>
               </a:rPr>
-              <a:t>The RAG Pipeline</a:t>
+              <a:t>The RAG Pipeline — Two Phases</a:t>
+            </a:r>
+          </a:p>
+        </p:txBody>
+      </p:sp>
+      <p:sp>
+        <p:nvSpPr>
+          <p:cNvPr id="5" name="TextBox 4"/>
+          <p:cNvSpPr txBox="1"/>
+          <p:nvPr/>
+        </p:nvSpPr>
+        <p:spPr>
+          <a:xfrm>
+            <a:off x="731520" y="1280160"/>
+            <a:ext cx="5120640" cy="548640"/>
+          </a:xfrm>
+          <a:prstGeom prst="rect">
+            <a:avLst/>
+          </a:prstGeom>
+          <a:noFill/>
+        </p:spPr>
+        <p:txBody>
+          <a:bodyPr wrap="square">
+            <a:spAutoFit/>
+          </a:bodyPr>
+          <a:lstStyle/>
+          <a:p>
+            <a:pPr algn="l"/>
+            <a:r>
+              <a:rPr sz="2000" b="1">
+                <a:solidFill>
+                  <a:srgbClr val="128C8C"/>
+                </a:solidFill>
+                <a:latin typeface="Calibri"/>
+              </a:rPr>
+              <a:t>Indexing (once, ahead)</a:t>
+            </a:r>
+          </a:p>
+        </p:txBody>
+      </p:sp>
+      <p:sp>
+        <p:nvSpPr>
+          <p:cNvPr id="6" name="TextBox 5"/>
+          <p:cNvSpPr txBox="1"/>
+          <p:nvPr/>
+        </p:nvSpPr>
+        <p:spPr>
+          <a:xfrm>
+            <a:off x="731520" y="1828800"/>
+            <a:ext cx="5120640" cy="4206240"/>
+          </a:xfrm>
+          <a:prstGeom prst="rect">
+            <a:avLst/>
+          </a:prstGeom>
+          <a:noFill/>
+        </p:spPr>
+        <p:txBody>
+          <a:bodyPr wrap="square">
+            <a:spAutoFit/>
+          </a:bodyPr>
+          <a:lstStyle/>
+          <a:p>
+            <a:pPr>
+              <a:spcAft>
+                <a:spcPts val="800"/>
+              </a:spcAft>
+            </a:pPr>
+            <a:r>
+              <a:rPr sz="1800">
+                <a:solidFill>
+                  <a:srgbClr val="1A1A1A"/>
+                </a:solidFill>
+                <a:latin typeface="Calibri"/>
+              </a:rPr>
+              <a:t>• load documents</a:t>
+            </a:r>
+          </a:p>
+          <a:p>
+            <a:pPr>
+              <a:spcAft>
+                <a:spcPts val="800"/>
+              </a:spcAft>
+            </a:pPr>
+            <a:r>
+              <a:rPr sz="1800">
+                <a:solidFill>
+                  <a:srgbClr val="1A1A1A"/>
+                </a:solidFill>
+                <a:latin typeface="Calibri"/>
+              </a:rPr>
+              <a:t>• chunk into passages</a:t>
+            </a:r>
+          </a:p>
+          <a:p>
+            <a:pPr>
+              <a:spcAft>
+                <a:spcPts val="800"/>
+              </a:spcAft>
+            </a:pPr>
+            <a:r>
+              <a:rPr sz="1800">
+                <a:solidFill>
+                  <a:srgbClr val="1A1A1A"/>
+                </a:solidFill>
+                <a:latin typeface="Calibri"/>
+              </a:rPr>
+              <a:t>• embed each chunk</a:t>
+            </a:r>
+          </a:p>
+          <a:p>
+            <a:pPr>
+              <a:spcAft>
+                <a:spcPts val="800"/>
+              </a:spcAft>
+            </a:pPr>
+            <a:r>
+              <a:rPr sz="1800">
+                <a:solidFill>
+                  <a:srgbClr val="1A1A1A"/>
+                </a:solidFill>
+                <a:latin typeface="Calibri"/>
+              </a:rPr>
+              <a:t>• store in ChromaDB + metadata</a:t>
+            </a:r>
+          </a:p>
+        </p:txBody>
+      </p:sp>
+      <p:sp>
+        <p:nvSpPr>
+          <p:cNvPr id="7" name="TextBox 6"/>
+          <p:cNvSpPr txBox="1"/>
+          <p:nvPr/>
+        </p:nvSpPr>
+        <p:spPr>
+          <a:xfrm>
+            <a:off x="6309360" y="1280160"/>
+            <a:ext cx="5120640" cy="548640"/>
+          </a:xfrm>
+          <a:prstGeom prst="rect">
+            <a:avLst/>
+          </a:prstGeom>
+          <a:noFill/>
+        </p:spPr>
+        <p:txBody>
+          <a:bodyPr wrap="square">
+            <a:spAutoFit/>
+          </a:bodyPr>
+          <a:lstStyle/>
+          <a:p>
+            <a:pPr algn="l"/>
+            <a:r>
+              <a:rPr sz="2000" b="1">
+                <a:solidFill>
+                  <a:srgbClr val="128C8C"/>
+                </a:solidFill>
+                <a:latin typeface="Calibri"/>
+              </a:rPr>
+              <a:t>Query time (per question)</a:t>
+            </a:r>
+          </a:p>
+        </p:txBody>
+      </p:sp>
+      <p:sp>
+        <p:nvSpPr>
+          <p:cNvPr id="8" name="TextBox 7"/>
+          <p:cNvSpPr txBox="1"/>
+          <p:nvPr/>
+        </p:nvSpPr>
+        <p:spPr>
+          <a:xfrm>
+            <a:off x="6309360" y="1828800"/>
+            <a:ext cx="5120640" cy="4206240"/>
+          </a:xfrm>
+          <a:prstGeom prst="rect">
+            <a:avLst/>
+          </a:prstGeom>
+          <a:noFill/>
+        </p:spPr>
+        <p:txBody>
+          <a:bodyPr wrap="square">
+            <a:spAutoFit/>
+          </a:bodyPr>
+          <a:lstStyle/>
+          <a:p>
+            <a:pPr>
+              <a:spcAft>
+                <a:spcPts val="800"/>
+              </a:spcAft>
+            </a:pPr>
+            <a:r>
+              <a:rPr sz="1800">
+                <a:solidFill>
+                  <a:srgbClr val="1A1A1A"/>
+                </a:solidFill>
+                <a:latin typeface="Calibri"/>
+              </a:rPr>
+              <a:t>• embed the question</a:t>
+            </a:r>
+          </a:p>
+          <a:p>
+            <a:pPr>
+              <a:spcAft>
+                <a:spcPts val="800"/>
+              </a:spcAft>
+            </a:pPr>
+            <a:r>
+              <a:rPr sz="1800">
+                <a:solidFill>
+                  <a:srgbClr val="1A1A1A"/>
+                </a:solidFill>
+                <a:latin typeface="Calibri"/>
+              </a:rPr>
+              <a:t>• retrieve top-k chunks</a:t>
+            </a:r>
+          </a:p>
+          <a:p>
+            <a:pPr>
+              <a:spcAft>
+                <a:spcPts val="800"/>
+              </a:spcAft>
+            </a:pPr>
+            <a:r>
+              <a:rPr sz="1800">
+                <a:solidFill>
+                  <a:srgbClr val="1A1A1A"/>
+                </a:solidFill>
+                <a:latin typeface="Calibri"/>
+              </a:rPr>
+              <a:t>• ground the prompt</a:t>
+            </a:r>
+          </a:p>
+          <a:p>
+            <a:pPr>
+              <a:spcAft>
+                <a:spcPts val="800"/>
+              </a:spcAft>
+            </a:pPr>
+            <a:r>
+              <a:rPr sz="1800">
+                <a:solidFill>
+                  <a:srgbClr val="1A1A1A"/>
+                </a:solidFill>
+                <a:latin typeface="Calibri"/>
+              </a:rPr>
+              <a:t>• generate + cite (Claude / Gemini)</a:t>
+            </a:r>
+          </a:p>
+        </p:txBody>
+      </p:sp>
+      <p:sp>
+        <p:nvSpPr>
+          <p:cNvPr id="9" name="TextBox 8"/>
+          <p:cNvSpPr txBox="1"/>
+          <p:nvPr/>
+        </p:nvSpPr>
+        <p:spPr>
+          <a:xfrm>
+            <a:off x="365760" y="6446520"/>
+            <a:ext cx="8229600" cy="365760"/>
+          </a:xfrm>
+          <a:prstGeom prst="rect">
+            <a:avLst/>
+          </a:prstGeom>
+          <a:noFill/>
+        </p:spPr>
+        <p:txBody>
+          <a:bodyPr wrap="square">
+            <a:spAutoFit/>
+          </a:bodyPr>
+          <a:lstStyle/>
+          <a:p>
+            <a:pPr algn="l"/>
+            <a:r>
+              <a:rPr sz="1000" b="0">
+                <a:solidFill>
+                  <a:srgbClr val="6B7280"/>
+                </a:solidFill>
+                <a:latin typeface="Calibri"/>
+              </a:rPr>
+              <a:t>Palomar College · CSCI 250 · Fall 2026</a:t>
+            </a:r>
+          </a:p>
+        </p:txBody>
+      </p:sp>
+      <p:sp>
+        <p:nvSpPr>
+          <p:cNvPr id="10" name="TextBox 9"/>
+          <p:cNvSpPr txBox="1"/>
+          <p:nvPr/>
+        </p:nvSpPr>
+        <p:spPr>
+          <a:xfrm>
+            <a:off x="11155680" y="6446520"/>
+            <a:ext cx="822960" cy="365760"/>
+          </a:xfrm>
+          <a:prstGeom prst="rect">
+            <a:avLst/>
+          </a:prstGeom>
+          <a:noFill/>
+        </p:spPr>
+        <p:txBody>
+          <a:bodyPr wrap="square">
+            <a:spAutoFit/>
+          </a:bodyPr>
+          <a:lstStyle/>
+          <a:p>
+            <a:pPr algn="r"/>
+            <a:r>
+              <a:rPr sz="1000" b="0">
+                <a:solidFill>
+                  <a:srgbClr val="6B7280"/>
+                </a:solidFill>
+                <a:latin typeface="Calibri"/>
+              </a:rPr>
+              <a:t>5/15</a:t>
             </a:r>
           </a:p>
         </p:txBody>
@@ -6937,21 +6457,140 @@
                 </a:solidFill>
                 <a:latin typeface="Calibri"/>
               </a:rPr>
-              <a:t>Two Phases</a:t>
-            </a:r>
-          </a:p>
-        </p:txBody>
-      </p:sp>
-      <p:sp>
-        <p:nvSpPr>
-          <p:cNvPr id="5" name="TextBox 4"/>
+              <a:t>Chunking — Split Documents Sensibly</a:t>
+            </a:r>
+          </a:p>
+        </p:txBody>
+      </p:sp>
+      <p:sp>
+        <p:nvSpPr>
+          <p:cNvPr id="5" name="Rectangle 4"/>
+          <p:cNvSpPr/>
+          <p:nvPr/>
+        </p:nvSpPr>
+        <p:spPr>
+          <a:xfrm>
+            <a:off x="548640" y="1325880"/>
+            <a:ext cx="11064240" cy="4480560"/>
+          </a:xfrm>
+          <a:prstGeom prst="rect">
+            <a:avLst/>
+          </a:prstGeom>
+          <a:solidFill>
+            <a:srgbClr val="1E1E1E"/>
+          </a:solidFill>
+          <a:ln>
+            <a:noFill/>
+          </a:ln>
+          <a:effectLst/>
+        </p:spPr>
+        <p:style>
+          <a:lnRef idx="1">
+            <a:schemeClr val="accent1"/>
+          </a:lnRef>
+          <a:fillRef idx="3">
+            <a:schemeClr val="accent1"/>
+          </a:fillRef>
+          <a:effectRef idx="2">
+            <a:schemeClr val="accent1"/>
+          </a:effectRef>
+          <a:fontRef idx="minor">
+            <a:schemeClr val="lt1"/>
+          </a:fontRef>
+        </p:style>
+        <p:txBody>
+          <a:bodyPr rtlCol="0" anchor="ctr" wrap="square" lIns="182880" tIns="137160"/>
+          <a:lstStyle/>
+          <a:p>
+            <a:pPr algn="ctr"/>
+            <a:r>
+              <a:rPr sz="1500">
+                <a:solidFill>
+                  <a:srgbClr val="E6E6E6"/>
+                </a:solidFill>
+                <a:latin typeface="Consolas"/>
+              </a:rPr>
+              <a:t>from langchain_text_splitters import RecursiveCharacterTextSplitter</a:t>
+            </a:r>
+          </a:p>
+          <a:p>
+            <a:r>
+              <a:rPr sz="1500">
+                <a:solidFill>
+                  <a:srgbClr val="E6E6E6"/>
+                </a:solidFill>
+                <a:latin typeface="Consolas"/>
+              </a:rPr>
+              <a:t> </a:t>
+            </a:r>
+          </a:p>
+          <a:p>
+            <a:r>
+              <a:rPr sz="1500">
+                <a:solidFill>
+                  <a:srgbClr val="E6E6E6"/>
+                </a:solidFill>
+                <a:latin typeface="Consolas"/>
+              </a:rPr>
+              <a:t>splitter = RecursiveCharacterTextSplitter(</a:t>
+            </a:r>
+          </a:p>
+          <a:p>
+            <a:r>
+              <a:rPr sz="1500">
+                <a:solidFill>
+                  <a:srgbClr val="E6E6E6"/>
+                </a:solidFill>
+                <a:latin typeface="Consolas"/>
+              </a:rPr>
+              <a:t>    chunk_size=500,     # ~chars per chunk</a:t>
+            </a:r>
+          </a:p>
+          <a:p>
+            <a:r>
+              <a:rPr sz="1500">
+                <a:solidFill>
+                  <a:srgbClr val="E6E6E6"/>
+                </a:solidFill>
+                <a:latin typeface="Consolas"/>
+              </a:rPr>
+              <a:t>    chunk_overlap=80,   # repeat text across boundaries</a:t>
+            </a:r>
+          </a:p>
+          <a:p>
+            <a:r>
+              <a:rPr sz="1500">
+                <a:solidFill>
+                  <a:srgbClr val="E6E6E6"/>
+                </a:solidFill>
+                <a:latin typeface="Consolas"/>
+              </a:rPr>
+              <a:t>)</a:t>
+            </a:r>
+          </a:p>
+          <a:p>
+            <a:r>
+              <a:rPr sz="1500">
+                <a:solidFill>
+                  <a:srgbClr val="E6E6E6"/>
+                </a:solidFill>
+                <a:latin typeface="Consolas"/>
+              </a:rPr>
+              <a:t>chunks = splitter.split_text(long_text)</a:t>
+            </a:r>
+          </a:p>
+        </p:txBody>
+      </p:sp>
+      <p:sp>
+        <p:nvSpPr>
+          <p:cNvPr id="6" name="TextBox 5"/>
           <p:cNvSpPr txBox="1"/>
           <p:nvPr/>
         </p:nvSpPr>
         <p:spPr>
           <a:xfrm>
-            <a:off x="731520" y="1280160"/>
-            <a:ext cx="5120640" cy="548640"/>
+            <a:off x="548640" y="5897880"/>
+            <a:ext cx="10515600" cy="457200"/>
           </a:xfrm>
           <a:prstGeom prst="rect">
             <a:avLst/>
@@ -6966,27 +6605,27 @@
           <a:p>
             <a:pPr algn="l"/>
             <a:r>
-              <a:rPr sz="2000" b="1">
-                <a:solidFill>
-                  <a:srgbClr val="128C8C"/>
-                </a:solidFill>
-                <a:latin typeface="Calibri"/>
-              </a:rPr>
-              <a:t>Indexing (once, ahead)</a:t>
-            </a:r>
-          </a:p>
-        </p:txBody>
-      </p:sp>
-      <p:sp>
-        <p:nvSpPr>
-          <p:cNvPr id="6" name="TextBox 5"/>
+              <a:rPr sz="1400" b="0">
+                <a:solidFill>
+                  <a:srgbClr val="6B7280"/>
+                </a:solidFill>
+                <a:latin typeface="Calibri"/>
+              </a:rPr>
+              <a:t>Too big = noisy retrieval; too small = ideas cut in half; overlap keeps them whole</a:t>
+            </a:r>
+          </a:p>
+        </p:txBody>
+      </p:sp>
+      <p:sp>
+        <p:nvSpPr>
+          <p:cNvPr id="7" name="TextBox 6"/>
           <p:cNvSpPr txBox="1"/>
           <p:nvPr/>
         </p:nvSpPr>
         <p:spPr>
           <a:xfrm>
-            <a:off x="731520" y="1828800"/>
-            <a:ext cx="5120640" cy="4206240"/>
+            <a:off x="365760" y="6446520"/>
+            <a:ext cx="8229600" cy="365760"/>
           </a:xfrm>
           <a:prstGeom prst="rect">
             <a:avLst/>
@@ -6999,81 +6638,29 @@
           </a:bodyPr>
           <a:lstStyle/>
           <a:p>
-            <a:pPr>
-              <a:spcAft>
-                <a:spcPts val="800"/>
-              </a:spcAft>
-            </a:pPr>
-            <a:r>
-              <a:rPr sz="1800">
-                <a:solidFill>
-                  <a:srgbClr val="1A1A1A"/>
-                </a:solidFill>
-                <a:latin typeface="Calibri"/>
-              </a:rPr>
-              <a:t>• load documents</a:t>
-            </a:r>
-          </a:p>
-          <a:p>
-            <a:pPr>
-              <a:spcAft>
-                <a:spcPts val="800"/>
-              </a:spcAft>
-            </a:pPr>
-            <a:r>
-              <a:rPr sz="1800">
-                <a:solidFill>
-                  <a:srgbClr val="1A1A1A"/>
-                </a:solidFill>
-                <a:latin typeface="Calibri"/>
-              </a:rPr>
-              <a:t>• chunk into passages</a:t>
-            </a:r>
-          </a:p>
-          <a:p>
-            <a:pPr>
-              <a:spcAft>
-                <a:spcPts val="800"/>
-              </a:spcAft>
-            </a:pPr>
-            <a:r>
-              <a:rPr sz="1800">
-                <a:solidFill>
-                  <a:srgbClr val="1A1A1A"/>
-                </a:solidFill>
-                <a:latin typeface="Calibri"/>
-              </a:rPr>
-              <a:t>• embed each chunk</a:t>
-            </a:r>
-          </a:p>
-          <a:p>
-            <a:pPr>
-              <a:spcAft>
-                <a:spcPts val="800"/>
-              </a:spcAft>
-            </a:pPr>
-            <a:r>
-              <a:rPr sz="1800">
-                <a:solidFill>
-                  <a:srgbClr val="1A1A1A"/>
-                </a:solidFill>
-                <a:latin typeface="Calibri"/>
-              </a:rPr>
-              <a:t>• store in ChromaDB + metadata</a:t>
-            </a:r>
-          </a:p>
-        </p:txBody>
-      </p:sp>
-      <p:sp>
-        <p:nvSpPr>
-          <p:cNvPr id="7" name="TextBox 6"/>
+            <a:pPr algn="l"/>
+            <a:r>
+              <a:rPr sz="1000" b="0">
+                <a:solidFill>
+                  <a:srgbClr val="6B7280"/>
+                </a:solidFill>
+                <a:latin typeface="Calibri"/>
+              </a:rPr>
+              <a:t>Palomar College · CSCI 250 · Fall 2026</a:t>
+            </a:r>
+          </a:p>
+        </p:txBody>
+      </p:sp>
+      <p:sp>
+        <p:nvSpPr>
+          <p:cNvPr id="8" name="TextBox 7"/>
           <p:cNvSpPr txBox="1"/>
           <p:nvPr/>
         </p:nvSpPr>
         <p:spPr>
           <a:xfrm>
-            <a:off x="6309360" y="1280160"/>
-            <a:ext cx="5120640" cy="548640"/>
+            <a:off x="11155680" y="6446520"/>
+            <a:ext cx="822960" cy="365760"/>
           </a:xfrm>
           <a:prstGeom prst="rect">
             <a:avLst/>
@@ -7086,129 +6673,7 @@
           </a:bodyPr>
           <a:lstStyle/>
           <a:p>
-            <a:pPr algn="l"/>
-            <a:r>
-              <a:rPr sz="2000" b="1">
-                <a:solidFill>
-                  <a:srgbClr val="128C8C"/>
-                </a:solidFill>
-                <a:latin typeface="Calibri"/>
-              </a:rPr>
-              <a:t>Query time (per question)</a:t>
-            </a:r>
-          </a:p>
-        </p:txBody>
-      </p:sp>
-      <p:sp>
-        <p:nvSpPr>
-          <p:cNvPr id="8" name="TextBox 7"/>
-          <p:cNvSpPr txBox="1"/>
-          <p:nvPr/>
-        </p:nvSpPr>
-        <p:spPr>
-          <a:xfrm>
-            <a:off x="6309360" y="1828800"/>
-            <a:ext cx="5120640" cy="4206240"/>
-          </a:xfrm>
-          <a:prstGeom prst="rect">
-            <a:avLst/>
-          </a:prstGeom>
-          <a:noFill/>
-        </p:spPr>
-        <p:txBody>
-          <a:bodyPr wrap="square">
-            <a:spAutoFit/>
-          </a:bodyPr>
-          <a:lstStyle/>
-          <a:p>
-            <a:pPr>
-              <a:spcAft>
-                <a:spcPts val="800"/>
-              </a:spcAft>
-            </a:pPr>
-            <a:r>
-              <a:rPr sz="1800">
-                <a:solidFill>
-                  <a:srgbClr val="1A1A1A"/>
-                </a:solidFill>
-                <a:latin typeface="Calibri"/>
-              </a:rPr>
-              <a:t>• embed the question</a:t>
-            </a:r>
-          </a:p>
-          <a:p>
-            <a:pPr>
-              <a:spcAft>
-                <a:spcPts val="800"/>
-              </a:spcAft>
-            </a:pPr>
-            <a:r>
-              <a:rPr sz="1800">
-                <a:solidFill>
-                  <a:srgbClr val="1A1A1A"/>
-                </a:solidFill>
-                <a:latin typeface="Calibri"/>
-              </a:rPr>
-              <a:t>• retrieve top-k chunks</a:t>
-            </a:r>
-          </a:p>
-          <a:p>
-            <a:pPr>
-              <a:spcAft>
-                <a:spcPts val="800"/>
-              </a:spcAft>
-            </a:pPr>
-            <a:r>
-              <a:rPr sz="1800">
-                <a:solidFill>
-                  <a:srgbClr val="1A1A1A"/>
-                </a:solidFill>
-                <a:latin typeface="Calibri"/>
-              </a:rPr>
-              <a:t>• ground the prompt</a:t>
-            </a:r>
-          </a:p>
-          <a:p>
-            <a:pPr>
-              <a:spcAft>
-                <a:spcPts val="800"/>
-              </a:spcAft>
-            </a:pPr>
-            <a:r>
-              <a:rPr sz="1800">
-                <a:solidFill>
-                  <a:srgbClr val="1A1A1A"/>
-                </a:solidFill>
-                <a:latin typeface="Calibri"/>
-              </a:rPr>
-              <a:t>• generate + cite (Claude / Gemini)</a:t>
-            </a:r>
-          </a:p>
-        </p:txBody>
-      </p:sp>
-      <p:sp>
-        <p:nvSpPr>
-          <p:cNvPr id="9" name="TextBox 8"/>
-          <p:cNvSpPr txBox="1"/>
-          <p:nvPr/>
-        </p:nvSpPr>
-        <p:spPr>
-          <a:xfrm>
-            <a:off x="365760" y="6446520"/>
-            <a:ext cx="8229600" cy="365760"/>
-          </a:xfrm>
-          <a:prstGeom prst="rect">
-            <a:avLst/>
-          </a:prstGeom>
-          <a:noFill/>
-        </p:spPr>
-        <p:txBody>
-          <a:bodyPr wrap="square">
-            <a:spAutoFit/>
-          </a:bodyPr>
-          <a:lstStyle/>
-          <a:p>
-            <a:pPr algn="l"/>
+            <a:pPr algn="r"/>
             <a:r>
               <a:rPr sz="1000" b="0">
                 <a:solidFill>
@@ -7216,42 +6681,7 @@
                 </a:solidFill>
                 <a:latin typeface="Calibri"/>
               </a:rPr>
-              <a:t>Palomar College · CSCI 250 · Fall 2026</a:t>
-            </a:r>
-          </a:p>
-        </p:txBody>
-      </p:sp>
-      <p:sp>
-        <p:nvSpPr>
-          <p:cNvPr id="10" name="TextBox 9"/>
-          <p:cNvSpPr txBox="1"/>
-          <p:nvPr/>
-        </p:nvSpPr>
-        <p:spPr>
-          <a:xfrm>
-            <a:off x="11155680" y="6446520"/>
-            <a:ext cx="822960" cy="365760"/>
-          </a:xfrm>
-          <a:prstGeom prst="rect">
-            <a:avLst/>
-          </a:prstGeom>
-          <a:noFill/>
-        </p:spPr>
-        <p:txBody>
-          <a:bodyPr wrap="square">
-            <a:spAutoFit/>
-          </a:bodyPr>
-          <a:lstStyle/>
-          <a:p>
-            <a:pPr algn="r"/>
-            <a:r>
-              <a:rPr sz="1000" b="0">
-                <a:solidFill>
-                  <a:srgbClr val="6B7280"/>
-                </a:solidFill>
-                <a:latin typeface="Calibri"/>
-              </a:rPr>
-              <a:t>6/18</a:t>
+              <a:t>6/15</a:t>
             </a:r>
           </a:p>
         </p:txBody>
@@ -7270,7 +6700,7 @@
     <p:bg>
       <p:bgPr>
         <a:solidFill>
-          <a:srgbClr val="128C8C"/>
+          <a:srgbClr val="FFFFFF"/>
         </a:solidFill>
         <a:effectLst/>
       </p:bgPr>
@@ -7284,14 +6714,102 @@
       <p:grpSpPr/>
       <p:sp>
         <p:nvSpPr>
-          <p:cNvPr id="2" name="TextBox 1"/>
+          <p:cNvPr id="2" name="Rectangle 1"/>
+          <p:cNvSpPr/>
+          <p:nvPr/>
+        </p:nvSpPr>
+        <p:spPr>
+          <a:xfrm>
+            <a:off x="0" y="0"/>
+            <a:ext cx="12191695" cy="1051560"/>
+          </a:xfrm>
+          <a:prstGeom prst="rect">
+            <a:avLst/>
+          </a:prstGeom>
+          <a:solidFill>
+            <a:srgbClr val="0B1F3A"/>
+          </a:solidFill>
+          <a:ln>
+            <a:noFill/>
+          </a:ln>
+          <a:effectLst/>
+        </p:spPr>
+        <p:style>
+          <a:lnRef idx="1">
+            <a:schemeClr val="accent1"/>
+          </a:lnRef>
+          <a:fillRef idx="3">
+            <a:schemeClr val="accent1"/>
+          </a:fillRef>
+          <a:effectRef idx="2">
+            <a:schemeClr val="accent1"/>
+          </a:effectRef>
+          <a:fontRef idx="minor">
+            <a:schemeClr val="lt1"/>
+          </a:fontRef>
+        </p:style>
+        <p:txBody>
+          <a:bodyPr rtlCol="0" anchor="ctr"/>
+          <a:lstStyle/>
+          <a:p>
+            <a:pPr algn="ctr"/>
+          </a:p>
+        </p:txBody>
+      </p:sp>
+      <p:sp>
+        <p:nvSpPr>
+          <p:cNvPr id="3" name="Rectangle 2"/>
+          <p:cNvSpPr/>
+          <p:nvPr/>
+        </p:nvSpPr>
+        <p:spPr>
+          <a:xfrm>
+            <a:off x="0" y="1051560"/>
+            <a:ext cx="12191695" cy="54864"/>
+          </a:xfrm>
+          <a:prstGeom prst="rect">
+            <a:avLst/>
+          </a:prstGeom>
+          <a:solidFill>
+            <a:srgbClr val="128C8C"/>
+          </a:solidFill>
+          <a:ln>
+            <a:noFill/>
+          </a:ln>
+          <a:effectLst/>
+        </p:spPr>
+        <p:style>
+          <a:lnRef idx="1">
+            <a:schemeClr val="accent1"/>
+          </a:lnRef>
+          <a:fillRef idx="3">
+            <a:schemeClr val="accent1"/>
+          </a:fillRef>
+          <a:effectRef idx="2">
+            <a:schemeClr val="accent1"/>
+          </a:effectRef>
+          <a:fontRef idx="minor">
+            <a:schemeClr val="lt1"/>
+          </a:fontRef>
+        </p:style>
+        <p:txBody>
+          <a:bodyPr rtlCol="0" anchor="ctr"/>
+          <a:lstStyle/>
+          <a:p>
+            <a:pPr algn="ctr"/>
+          </a:p>
+        </p:txBody>
+      </p:sp>
+      <p:sp>
+        <p:nvSpPr>
+          <p:cNvPr id="4" name="TextBox 3"/>
           <p:cNvSpPr txBox="1"/>
           <p:nvPr/>
         </p:nvSpPr>
         <p:spPr>
           <a:xfrm>
-            <a:off x="822960" y="2743200"/>
-            <a:ext cx="10515600" cy="1371600"/>
+            <a:off x="548640" y="201168"/>
+            <a:ext cx="11064240" cy="731520"/>
           </a:xfrm>
           <a:prstGeom prst="rect">
             <a:avLst/>
@@ -7306,13 +6824,248 @@
           <a:p>
             <a:pPr algn="l"/>
             <a:r>
-              <a:rPr sz="3600" b="1">
+              <a:rPr sz="2800" b="1">
                 <a:solidFill>
                   <a:srgbClr val="FFFFFF"/>
                 </a:solidFill>
                 <a:latin typeface="Calibri"/>
               </a:rPr>
-              <a:t>Chunking</a:t>
+              <a:t>Embed &amp; Store (with metadata)</a:t>
+            </a:r>
+          </a:p>
+        </p:txBody>
+      </p:sp>
+      <p:sp>
+        <p:nvSpPr>
+          <p:cNvPr id="5" name="Rectangle 4"/>
+          <p:cNvSpPr/>
+          <p:nvPr/>
+        </p:nvSpPr>
+        <p:spPr>
+          <a:xfrm>
+            <a:off x="548640" y="1325880"/>
+            <a:ext cx="11064240" cy="4480560"/>
+          </a:xfrm>
+          <a:prstGeom prst="rect">
+            <a:avLst/>
+          </a:prstGeom>
+          <a:solidFill>
+            <a:srgbClr val="1E1E1E"/>
+          </a:solidFill>
+          <a:ln>
+            <a:noFill/>
+          </a:ln>
+          <a:effectLst/>
+        </p:spPr>
+        <p:style>
+          <a:lnRef idx="1">
+            <a:schemeClr val="accent1"/>
+          </a:lnRef>
+          <a:fillRef idx="3">
+            <a:schemeClr val="accent1"/>
+          </a:fillRef>
+          <a:effectRef idx="2">
+            <a:schemeClr val="accent1"/>
+          </a:effectRef>
+          <a:fontRef idx="minor">
+            <a:schemeClr val="lt1"/>
+          </a:fontRef>
+        </p:style>
+        <p:txBody>
+          <a:bodyPr rtlCol="0" anchor="ctr" wrap="square" lIns="182880" tIns="137160"/>
+          <a:lstStyle/>
+          <a:p>
+            <a:pPr algn="ctr"/>
+            <a:r>
+              <a:rPr sz="1500">
+                <a:solidFill>
+                  <a:srgbClr val="E6E6E6"/>
+                </a:solidFill>
+                <a:latin typeface="Consolas"/>
+              </a:rPr>
+              <a:t>import chromadb</a:t>
+            </a:r>
+          </a:p>
+          <a:p>
+            <a:r>
+              <a:rPr sz="1500">
+                <a:solidFill>
+                  <a:srgbClr val="E6E6E6"/>
+                </a:solidFill>
+                <a:latin typeface="Consolas"/>
+              </a:rPr>
+              <a:t>col = chromadb.Client().create_collection('kb')</a:t>
+            </a:r>
+          </a:p>
+          <a:p>
+            <a:r>
+              <a:rPr sz="1500">
+                <a:solidFill>
+                  <a:srgbClr val="E6E6E6"/>
+                </a:solidFill>
+                <a:latin typeface="Consolas"/>
+              </a:rPr>
+              <a:t>col.add(</a:t>
+            </a:r>
+          </a:p>
+          <a:p>
+            <a:r>
+              <a:rPr sz="1500">
+                <a:solidFill>
+                  <a:srgbClr val="E6E6E6"/>
+                </a:solidFill>
+                <a:latin typeface="Consolas"/>
+              </a:rPr>
+              <a:t>    documents=chunks,</a:t>
+            </a:r>
+          </a:p>
+          <a:p>
+            <a:r>
+              <a:rPr sz="1500">
+                <a:solidFill>
+                  <a:srgbClr val="E6E6E6"/>
+                </a:solidFill>
+                <a:latin typeface="Consolas"/>
+              </a:rPr>
+              <a:t>    metadatas=[{'source': 'handbook.txt', 'chunk': i}</a:t>
+            </a:r>
+          </a:p>
+          <a:p>
+            <a:r>
+              <a:rPr sz="1500">
+                <a:solidFill>
+                  <a:srgbClr val="E6E6E6"/>
+                </a:solidFill>
+                <a:latin typeface="Consolas"/>
+              </a:rPr>
+              <a:t>               for i in range(len(chunks))],</a:t>
+            </a:r>
+          </a:p>
+          <a:p>
+            <a:r>
+              <a:rPr sz="1500">
+                <a:solidFill>
+                  <a:srgbClr val="E6E6E6"/>
+                </a:solidFill>
+                <a:latin typeface="Consolas"/>
+              </a:rPr>
+              <a:t>    ids=[f'c{i}' for i in range(len(chunks))],</a:t>
+            </a:r>
+          </a:p>
+          <a:p>
+            <a:r>
+              <a:rPr sz="1500">
+                <a:solidFill>
+                  <a:srgbClr val="E6E6E6"/>
+                </a:solidFill>
+                <a:latin typeface="Consolas"/>
+              </a:rPr>
+              <a:t>)</a:t>
+            </a:r>
+          </a:p>
+        </p:txBody>
+      </p:sp>
+      <p:sp>
+        <p:nvSpPr>
+          <p:cNvPr id="6" name="TextBox 5"/>
+          <p:cNvSpPr txBox="1"/>
+          <p:nvPr/>
+        </p:nvSpPr>
+        <p:spPr>
+          <a:xfrm>
+            <a:off x="548640" y="5897880"/>
+            <a:ext cx="10515600" cy="457200"/>
+          </a:xfrm>
+          <a:prstGeom prst="rect">
+            <a:avLst/>
+          </a:prstGeom>
+          <a:noFill/>
+        </p:spPr>
+        <p:txBody>
+          <a:bodyPr wrap="square">
+            <a:spAutoFit/>
+          </a:bodyPr>
+          <a:lstStyle/>
+          <a:p>
+            <a:pPr algn="l"/>
+            <a:r>
+              <a:rPr sz="1400" b="0">
+                <a:solidFill>
+                  <a:srgbClr val="6B7280"/>
+                </a:solidFill>
+                <a:latin typeface="Calibri"/>
+              </a:rPr>
+              <a:t>Metadata (source, chunk #) is what makes citations possible later</a:t>
+            </a:r>
+          </a:p>
+        </p:txBody>
+      </p:sp>
+      <p:sp>
+        <p:nvSpPr>
+          <p:cNvPr id="7" name="TextBox 6"/>
+          <p:cNvSpPr txBox="1"/>
+          <p:nvPr/>
+        </p:nvSpPr>
+        <p:spPr>
+          <a:xfrm>
+            <a:off x="365760" y="6446520"/>
+            <a:ext cx="8229600" cy="365760"/>
+          </a:xfrm>
+          <a:prstGeom prst="rect">
+            <a:avLst/>
+          </a:prstGeom>
+          <a:noFill/>
+        </p:spPr>
+        <p:txBody>
+          <a:bodyPr wrap="square">
+            <a:spAutoFit/>
+          </a:bodyPr>
+          <a:lstStyle/>
+          <a:p>
+            <a:pPr algn="l"/>
+            <a:r>
+              <a:rPr sz="1000" b="0">
+                <a:solidFill>
+                  <a:srgbClr val="6B7280"/>
+                </a:solidFill>
+                <a:latin typeface="Calibri"/>
+              </a:rPr>
+              <a:t>Palomar College · CSCI 250 · Fall 2026</a:t>
+            </a:r>
+          </a:p>
+        </p:txBody>
+      </p:sp>
+      <p:sp>
+        <p:nvSpPr>
+          <p:cNvPr id="8" name="TextBox 7"/>
+          <p:cNvSpPr txBox="1"/>
+          <p:nvPr/>
+        </p:nvSpPr>
+        <p:spPr>
+          <a:xfrm>
+            <a:off x="11155680" y="6446520"/>
+            <a:ext cx="822960" cy="365760"/>
+          </a:xfrm>
+          <a:prstGeom prst="rect">
+            <a:avLst/>
+          </a:prstGeom>
+          <a:noFill/>
+        </p:spPr>
+        <p:txBody>
+          <a:bodyPr wrap="square">
+            <a:spAutoFit/>
+          </a:bodyPr>
+          <a:lstStyle/>
+          <a:p>
+            <a:pPr algn="r"/>
+            <a:r>
+              <a:rPr sz="1000" b="0">
+                <a:solidFill>
+                  <a:srgbClr val="6B7280"/>
+                </a:solidFill>
+                <a:latin typeface="Calibri"/>
+              </a:rPr>
+              <a:t>7/15</a:t>
             </a:r>
           </a:p>
         </p:txBody>
@@ -7461,7 +7214,7 @@
                 </a:solidFill>
                 <a:latin typeface="Calibri"/>
               </a:rPr>
-              <a:t>Split Documents Sensibly</a:t>
+              <a:t>Retrieve, then Ground the Prompt</a:t>
             </a:r>
           </a:p>
         </p:txBody>
@@ -7514,7 +7267,7 @@
                 </a:solidFill>
                 <a:latin typeface="Consolas"/>
               </a:rPr>
-              <a:t>from langchain_text_splitters import RecursiveCharacterTextSplitter</a:t>
+              <a:t>res = col.query(query_texts=[question], n_results=3)</a:t>
             </a:r>
           </a:p>
           <a:p>
@@ -7525,6 +7278,39 @@
                 </a:solidFill>
                 <a:latin typeface="Consolas"/>
               </a:rPr>
+              <a:t>retrieved = res['documents'][0]</a:t>
+            </a:r>
+          </a:p>
+          <a:p>
+            <a:r>
+              <a:rPr sz="1500">
+                <a:solidFill>
+                  <a:srgbClr val="E6E6E6"/>
+                </a:solidFill>
+                <a:latin typeface="Consolas"/>
+              </a:rPr>
+              <a:t>context = '\n\n'.join(f'[{i+1}] {c}'</a:t>
+            </a:r>
+          </a:p>
+          <a:p>
+            <a:r>
+              <a:rPr sz="1500">
+                <a:solidFill>
+                  <a:srgbClr val="E6E6E6"/>
+                </a:solidFill>
+                <a:latin typeface="Consolas"/>
+              </a:rPr>
+              <a:t>                       for i, c in enumerate(retrieved))</a:t>
+            </a:r>
+          </a:p>
+          <a:p>
+            <a:r>
+              <a:rPr sz="1500">
+                <a:solidFill>
+                  <a:srgbClr val="E6E6E6"/>
+                </a:solidFill>
+                <a:latin typeface="Consolas"/>
+              </a:rPr>
               <a:t> </a:t>
             </a:r>
           </a:p>
@@ -7536,7 +7322,7 @@
                 </a:solidFill>
                 <a:latin typeface="Consolas"/>
               </a:rPr>
-              <a:t>splitter = RecursiveCharacterTextSplitter(</a:t>
+              <a:t>prompt = f'''Answer using ONLY the context below.</a:t>
             </a:r>
           </a:p>
           <a:p>
@@ -7547,7 +7333,7 @@
                 </a:solidFill>
                 <a:latin typeface="Consolas"/>
               </a:rPr>
-              <a:t>    chunk_size=500,     # ~chars per chunk</a:t>
+              <a:t>If it is not in the context, say "I don't know."</a:t>
             </a:r>
           </a:p>
           <a:p>
@@ -7558,7 +7344,7 @@
                 </a:solidFill>
                 <a:latin typeface="Consolas"/>
               </a:rPr>
-              <a:t>    chunk_overlap=80,   # repeat text across boundaries</a:t>
+              <a:t>Cite sources by [number].</a:t>
             </a:r>
           </a:p>
           <a:p>
@@ -7569,7 +7355,7 @@
                 </a:solidFill>
                 <a:latin typeface="Consolas"/>
               </a:rPr>
-              <a:t>)</a:t>
+              <a:t> </a:t>
             </a:r>
           </a:p>
           <a:p>
@@ -7580,7 +7366,7 @@
                 </a:solidFill>
                 <a:latin typeface="Consolas"/>
               </a:rPr>
-              <a:t>chunks = splitter.split_text(long_text)</a:t>
+              <a:t>Context:\n{context}\n\nQuestion: {question}'''</a:t>
             </a:r>
           </a:p>
         </p:txBody>
@@ -7615,7 +7401,7 @@
                 </a:solidFill>
                 <a:latin typeface="Calibri"/>
               </a:rPr>
-              <a:t>Too big = noisy retrieval; too small = ideas cut in half; overlap keeps them whole</a:t>
+              <a:t>The grounding instruction is the heart of RAG</a:t>
             </a:r>
           </a:p>
         </p:txBody>
@@ -7685,7 +7471,7 @@
                 </a:solidFill>
                 <a:latin typeface="Calibri"/>
               </a:rPr>
-              <a:t>8/18</a:t>
+              <a:t>8/15</a:t>
             </a:r>
           </a:p>
         </p:txBody>
@@ -7834,7 +7620,7 @@
                 </a:solidFill>
                 <a:latin typeface="Calibri"/>
               </a:rPr>
-              <a:t>Embed &amp; Store (with metadata)</a:t>
+              <a:t>Generate — Claude &amp; Gemini</a:t>
             </a:r>
           </a:p>
         </p:txBody>
@@ -7887,7 +7673,7 @@
                 </a:solidFill>
                 <a:latin typeface="Consolas"/>
               </a:rPr>
-              <a:t>import chromadb</a:t>
+              <a:t># Claude</a:t>
             </a:r>
           </a:p>
           <a:p>
@@ -7898,7 +7684,7 @@
                 </a:solidFill>
                 <a:latin typeface="Consolas"/>
               </a:rPr>
-              <a:t>col = chromadb.Client().create_collection('kb')</a:t>
+              <a:t>import anthropic</a:t>
             </a:r>
           </a:p>
           <a:p>
@@ -7909,7 +7695,7 @@
                 </a:solidFill>
                 <a:latin typeface="Consolas"/>
               </a:rPr>
-              <a:t>col.add(</a:t>
+              <a:t>msg = anthropic.Anthropic().messages.create(</a:t>
             </a:r>
           </a:p>
           <a:p>
@@ -7920,7 +7706,7 @@
                 </a:solidFill>
                 <a:latin typeface="Consolas"/>
               </a:rPr>
-              <a:t>    documents=chunks,</a:t>
+              <a:t>    model='claude-sonnet-4-6', max_tokens=400,</a:t>
             </a:r>
           </a:p>
           <a:p>
@@ -7931,7 +7717,7 @@
                 </a:solidFill>
                 <a:latin typeface="Consolas"/>
               </a:rPr>
-              <a:t>    metadatas=[{'source': 'handbook.txt', 'chunk': i}</a:t>
+              <a:t>    messages=[{'role':'user','content':prompt}])</a:t>
             </a:r>
           </a:p>
           <a:p>
@@ -7942,7 +7728,7 @@
                 </a:solidFill>
                 <a:latin typeface="Consolas"/>
               </a:rPr>
-              <a:t>               for i in range(len(chunks))],</a:t>
+              <a:t>print(msg.content[0].text)</a:t>
             </a:r>
           </a:p>
           <a:p>
@@ -7953,7 +7739,7 @@
                 </a:solidFill>
                 <a:latin typeface="Consolas"/>
               </a:rPr>
-              <a:t>    ids=[f'c{i}' for i in range(len(chunks))],</a:t>
+              <a:t> </a:t>
             </a:r>
           </a:p>
           <a:p>
@@ -7964,7 +7750,51 @@
                 </a:solidFill>
                 <a:latin typeface="Consolas"/>
               </a:rPr>
-              <a:t>)</a:t>
+              <a:t># Gemini</a:t>
+            </a:r>
+          </a:p>
+          <a:p>
+            <a:r>
+              <a:rPr sz="1500">
+                <a:solidFill>
+                  <a:srgbClr val="E6E6E6"/>
+                </a:solidFill>
+                <a:latin typeface="Consolas"/>
+              </a:rPr>
+              <a:t>import google.generativeai as genai</a:t>
+            </a:r>
+          </a:p>
+          <a:p>
+            <a:r>
+              <a:rPr sz="1500">
+                <a:solidFill>
+                  <a:srgbClr val="E6E6E6"/>
+                </a:solidFill>
+                <a:latin typeface="Consolas"/>
+              </a:rPr>
+              <a:t>genai.configure(api_key=os.environ['GEMINI_API_KEY'])</a:t>
+            </a:r>
+          </a:p>
+          <a:p>
+            <a:r>
+              <a:rPr sz="1500">
+                <a:solidFill>
+                  <a:srgbClr val="E6E6E6"/>
+                </a:solidFill>
+                <a:latin typeface="Consolas"/>
+              </a:rPr>
+              <a:t>g = genai.GenerativeModel('gemini-2.5-flash')</a:t>
+            </a:r>
+          </a:p>
+          <a:p>
+            <a:r>
+              <a:rPr sz="1500">
+                <a:solidFill>
+                  <a:srgbClr val="E6E6E6"/>
+                </a:solidFill>
+                <a:latin typeface="Consolas"/>
+              </a:rPr>
+              <a:t>print(g.generate_content(prompt).text)</a:t>
             </a:r>
           </a:p>
         </p:txBody>
@@ -7999,7 +7829,7 @@
                 </a:solidFill>
                 <a:latin typeface="Calibri"/>
               </a:rPr>
-              <a:t>Metadata (source, chunk #) is what makes citations possible later</a:t>
+              <a:t>Same retrieved context, two generators — compare faithfulness</a:t>
             </a:r>
           </a:p>
         </p:txBody>
@@ -8069,7 +7899,7 @@
                 </a:solidFill>
                 <a:latin typeface="Calibri"/>
               </a:rPr>
-              <a:t>9/18</a:t>
+              <a:t>9/15</a:t>
             </a:r>
           </a:p>
         </p:txBody>

--- a/CSCI250-Fall2026/content/Week11_RAG/slides.pptx
+++ b/CSCI250-Fall2026/content/Week11_RAG/slides.pptx
@@ -20,6 +20,8 @@
     <p:sldId id="268" r:id="rId19"/>
     <p:sldId id="269" r:id="rId20"/>
     <p:sldId id="270" r:id="rId21"/>
+    <p:sldId id="271" r:id="rId22"/>
+    <p:sldId id="272" r:id="rId23"/>
   </p:sldIdLst>
   <p:sldSz cx="12191695" cy="6858000" type="screen4x3"/>
   <p:notesSz cx="6858000" cy="9144000"/>
@@ -3474,6 +3476,22 @@
               <a:t>– Print the retrieved chunks FIRST when debugging</a:t>
             </a:r>
           </a:p>
+          <a:p>
+            <a:pPr lvl="1">
+              <a:spcAft>
+                <a:spcPts val="800"/>
+              </a:spcAft>
+            </a:pPr>
+            <a:r>
+              <a:rPr sz="1800">
+                <a:solidFill>
+                  <a:srgbClr val="6B7280"/>
+                </a:solidFill>
+                <a:latin typeface="Calibri"/>
+              </a:rPr>
+              <a:t>– Responsible AI: RAG can still hallucinate — cite sources; retrieval amplifies corpus bias</a:t>
+            </a:r>
+          </a:p>
         </p:txBody>
       </p:sp>
       <p:sp>
@@ -3541,7 +3559,7 @@
                 </a:solidFill>
                 <a:latin typeface="Calibri"/>
               </a:rPr>
-              <a:t>10/15</a:t>
+              <a:t>10/17</a:t>
             </a:r>
           </a:p>
         </p:txBody>
@@ -3602,7 +3620,7 @@
                 </a:solidFill>
                 <a:latin typeface="Calibri"/>
               </a:rPr>
-              <a:t>Evaluate RAG — Measure, Don't Guess</a:t>
+              <a:t>Modern RAG (2026) — Beyond Plain Vector Search</a:t>
             </a:r>
           </a:p>
         </p:txBody>
@@ -3751,7 +3769,7 @@
                 </a:solidFill>
                 <a:latin typeface="Calibri"/>
               </a:rPr>
-              <a:t>The RAG Triad</a:t>
+              <a:t>Four Upgrades on Top of Dense + Fixed Chunks</a:t>
             </a:r>
           </a:p>
         </p:txBody>
@@ -3786,7 +3804,7 @@
                 </a:solidFill>
                 <a:latin typeface="Calibri"/>
               </a:rPr>
-              <a:t>Three links to check</a:t>
+              <a:t>Retrieve better</a:t>
             </a:r>
           </a:p>
         </p:txBody>
@@ -3825,7 +3843,7 @@
                 </a:solidFill>
                 <a:latin typeface="Calibri"/>
               </a:rPr>
-              <a:t>• Context Relevance: right chunks?</a:t>
+              <a:t>• Hybrid search: dense + BM25 keyword, FUSED</a:t>
             </a:r>
           </a:p>
           <a:p>
@@ -3841,7 +3859,7 @@
                 </a:solidFill>
                 <a:latin typeface="Calibri"/>
               </a:rPr>
-              <a:t>• Groundedness: answer supported?</a:t>
+              <a:t>•   -&gt; catches paraphrases AND exact tokens</a:t>
             </a:r>
           </a:p>
           <a:p>
@@ -3857,7 +3875,7 @@
                 </a:solidFill>
                 <a:latin typeface="Calibri"/>
               </a:rPr>
-              <a:t>• Answer Relevance: on topic?</a:t>
+              <a:t>• Rerank: cross-encoder reorders the top-k</a:t>
             </a:r>
           </a:p>
           <a:p>
@@ -3873,7 +3891,7 @@
                 </a:solidFill>
                 <a:latin typeface="Calibri"/>
               </a:rPr>
-              <a:t>• Each scored 1-5 by an LLM judge</a:t>
+              <a:t>•   -&gt; reads (question, chunk) together</a:t>
             </a:r>
           </a:p>
         </p:txBody>
@@ -3908,7 +3926,7 @@
                 </a:solidFill>
                 <a:latin typeface="Calibri"/>
               </a:rPr>
-              <a:t>Why it's powerful</a:t>
+              <a:t>Smarter context &amp; control</a:t>
             </a:r>
           </a:p>
         </p:txBody>
@@ -3947,7 +3965,7 @@
                 </a:solidFill>
                 <a:latin typeface="Calibri"/>
               </a:rPr>
-              <a:t>• Localizes the failure</a:t>
+              <a:t>• Contextual Retrieval (Anthropic):</a:t>
             </a:r>
           </a:p>
           <a:p>
@@ -3963,7 +3981,7 @@
                 </a:solidFill>
                 <a:latin typeface="Calibri"/>
               </a:rPr>
-              <a:t>• Low context -&gt; fix retrieval</a:t>
+              <a:t>•   prepend a context blurb before embedding</a:t>
             </a:r>
           </a:p>
           <a:p>
@@ -3979,7 +3997,7 @@
                 </a:solidFill>
                 <a:latin typeface="Calibri"/>
               </a:rPr>
-              <a:t>• Low groundedness -&gt; fix prompt</a:t>
+              <a:t>• Agentic RAG: model decides when/what</a:t>
             </a:r>
           </a:p>
           <a:p>
@@ -3995,7 +4013,23 @@
                 </a:solidFill>
                 <a:latin typeface="Calibri"/>
               </a:rPr>
-              <a:t>• Low answer rel. -&gt; fix framing</a:t>
+              <a:t>•   to retrieve; multi-step lookups</a:t>
+            </a:r>
+          </a:p>
+          <a:p>
+            <a:pPr>
+              <a:spcAft>
+                <a:spcPts val="800"/>
+              </a:spcAft>
+            </a:pPr>
+            <a:r>
+              <a:rPr sz="1800">
+                <a:solidFill>
+                  <a:srgbClr val="1A1A1A"/>
+                </a:solidFill>
+                <a:latin typeface="Calibri"/>
+              </a:rPr>
+              <a:t>• Add only where the triad says it's the bottleneck</a:t>
             </a:r>
           </a:p>
         </p:txBody>
@@ -4065,7 +4099,7 @@
                 </a:solidFill>
                 <a:latin typeface="Calibri"/>
               </a:rPr>
-              <a:t>12/15</a:t>
+              <a:t>12/17</a:t>
             </a:r>
           </a:p>
         </p:txBody>
@@ -4084,7 +4118,7 @@
     <p:bg>
       <p:bgPr>
         <a:solidFill>
-          <a:srgbClr val="FFFFFF"/>
+          <a:srgbClr val="128C8C"/>
         </a:solidFill>
         <a:effectLst/>
       </p:bgPr>
@@ -4098,102 +4132,14 @@
       <p:grpSpPr/>
       <p:sp>
         <p:nvSpPr>
-          <p:cNvPr id="2" name="Rectangle 1"/>
-          <p:cNvSpPr/>
-          <p:nvPr/>
-        </p:nvSpPr>
-        <p:spPr>
-          <a:xfrm>
-            <a:off x="0" y="0"/>
-            <a:ext cx="12191695" cy="1051560"/>
-          </a:xfrm>
-          <a:prstGeom prst="rect">
-            <a:avLst/>
-          </a:prstGeom>
-          <a:solidFill>
-            <a:srgbClr val="0B1F3A"/>
-          </a:solidFill>
-          <a:ln>
-            <a:noFill/>
-          </a:ln>
-          <a:effectLst/>
-        </p:spPr>
-        <p:style>
-          <a:lnRef idx="1">
-            <a:schemeClr val="accent1"/>
-          </a:lnRef>
-          <a:fillRef idx="3">
-            <a:schemeClr val="accent1"/>
-          </a:fillRef>
-          <a:effectRef idx="2">
-            <a:schemeClr val="accent1"/>
-          </a:effectRef>
-          <a:fontRef idx="minor">
-            <a:schemeClr val="lt1"/>
-          </a:fontRef>
-        </p:style>
-        <p:txBody>
-          <a:bodyPr rtlCol="0" anchor="ctr"/>
-          <a:lstStyle/>
-          <a:p>
-            <a:pPr algn="ctr"/>
-          </a:p>
-        </p:txBody>
-      </p:sp>
-      <p:sp>
-        <p:nvSpPr>
-          <p:cNvPr id="3" name="Rectangle 2"/>
-          <p:cNvSpPr/>
-          <p:nvPr/>
-        </p:nvSpPr>
-        <p:spPr>
-          <a:xfrm>
-            <a:off x="0" y="1051560"/>
-            <a:ext cx="12191695" cy="54864"/>
-          </a:xfrm>
-          <a:prstGeom prst="rect">
-            <a:avLst/>
-          </a:prstGeom>
-          <a:solidFill>
-            <a:srgbClr val="128C8C"/>
-          </a:solidFill>
-          <a:ln>
-            <a:noFill/>
-          </a:ln>
-          <a:effectLst/>
-        </p:spPr>
-        <p:style>
-          <a:lnRef idx="1">
-            <a:schemeClr val="accent1"/>
-          </a:lnRef>
-          <a:fillRef idx="3">
-            <a:schemeClr val="accent1"/>
-          </a:fillRef>
-          <a:effectRef idx="2">
-            <a:schemeClr val="accent1"/>
-          </a:effectRef>
-          <a:fontRef idx="minor">
-            <a:schemeClr val="lt1"/>
-          </a:fontRef>
-        </p:style>
-        <p:txBody>
-          <a:bodyPr rtlCol="0" anchor="ctr"/>
-          <a:lstStyle/>
-          <a:p>
-            <a:pPr algn="ctr"/>
-          </a:p>
-        </p:txBody>
-      </p:sp>
-      <p:sp>
-        <p:nvSpPr>
-          <p:cNvPr id="4" name="TextBox 3"/>
+          <p:cNvPr id="2" name="TextBox 1"/>
           <p:cNvSpPr txBox="1"/>
           <p:nvPr/>
         </p:nvSpPr>
         <p:spPr>
           <a:xfrm>
-            <a:off x="548640" y="201168"/>
-            <a:ext cx="11064240" cy="731520"/>
+            <a:off x="822960" y="2743200"/>
+            <a:ext cx="10515600" cy="1371600"/>
           </a:xfrm>
           <a:prstGeom prst="rect">
             <a:avLst/>
@@ -4208,259 +4154,13 @@
           <a:p>
             <a:pPr algn="l"/>
             <a:r>
-              <a:rPr sz="2800" b="1">
+              <a:rPr sz="3600" b="1">
                 <a:solidFill>
                   <a:srgbClr val="FFFFFF"/>
                 </a:solidFill>
                 <a:latin typeface="Calibri"/>
               </a:rPr>
-              <a:t>Score It With the Shared Helpers</a:t>
-            </a:r>
-          </a:p>
-        </p:txBody>
-      </p:sp>
-      <p:sp>
-        <p:nvSpPr>
-          <p:cNvPr id="5" name="Rectangle 4"/>
-          <p:cNvSpPr/>
-          <p:nvPr/>
-        </p:nvSpPr>
-        <p:spPr>
-          <a:xfrm>
-            <a:off x="548640" y="1325880"/>
-            <a:ext cx="11064240" cy="4480560"/>
-          </a:xfrm>
-          <a:prstGeom prst="rect">
-            <a:avLst/>
-          </a:prstGeom>
-          <a:solidFill>
-            <a:srgbClr val="1E1E1E"/>
-          </a:solidFill>
-          <a:ln>
-            <a:noFill/>
-          </a:ln>
-          <a:effectLst/>
-        </p:spPr>
-        <p:style>
-          <a:lnRef idx="1">
-            <a:schemeClr val="accent1"/>
-          </a:lnRef>
-          <a:fillRef idx="3">
-            <a:schemeClr val="accent1"/>
-          </a:fillRef>
-          <a:effectRef idx="2">
-            <a:schemeClr val="accent1"/>
-          </a:effectRef>
-          <a:fontRef idx="minor">
-            <a:schemeClr val="lt1"/>
-          </a:fontRef>
-        </p:style>
-        <p:txBody>
-          <a:bodyPr rtlCol="0" anchor="ctr" wrap="square" lIns="182880" tIns="137160"/>
-          <a:lstStyle/>
-          <a:p>
-            <a:pPr algn="ctr"/>
-            <a:r>
-              <a:rPr sz="1500">
-                <a:solidFill>
-                  <a:srgbClr val="E6E6E6"/>
-                </a:solidFill>
-                <a:latin typeface="Consolas"/>
-              </a:rPr>
-              <a:t>from eval_utils import llm_judge, scorecard</a:t>
-            </a:r>
-          </a:p>
-          <a:p>
-            <a:r>
-              <a:rPr sz="1500">
-                <a:solidFill>
-                  <a:srgbClr val="E6E6E6"/>
-                </a:solidFill>
-                <a:latin typeface="Consolas"/>
-              </a:rPr>
-              <a:t> </a:t>
-            </a:r>
-          </a:p>
-          <a:p>
-            <a:r>
-              <a:rPr sz="1500">
-                <a:solidFill>
-                  <a:srgbClr val="E6E6E6"/>
-                </a:solidFill>
-                <a:latin typeface="Consolas"/>
-              </a:rPr>
-              <a:t>rubric = ('Rate 1-5 how RELEVANT the answer is. '</a:t>
-            </a:r>
-          </a:p>
-          <a:p>
-            <a:r>
-              <a:rPr sz="1500">
-                <a:solidFill>
-                  <a:srgbClr val="E6E6E6"/>
-                </a:solidFill>
-                <a:latin typeface="Consolas"/>
-              </a:rPr>
-              <a:t>          'Return ONLY JSON: {"score": &lt;int&gt;, "reason": ""}.')</a:t>
-            </a:r>
-          </a:p>
-          <a:p>
-            <a:r>
-              <a:rPr sz="1500">
-                <a:solidFill>
-                  <a:srgbClr val="E6E6E6"/>
-                </a:solidFill>
-                <a:latin typeface="Consolas"/>
-              </a:rPr>
-              <a:t>llm_judge(question, answer, rubric)</a:t>
-            </a:r>
-          </a:p>
-          <a:p>
-            <a:r>
-              <a:rPr sz="1500">
-                <a:solidFill>
-                  <a:srgbClr val="E6E6E6"/>
-                </a:solidFill>
-                <a:latin typeface="Consolas"/>
-              </a:rPr>
-              <a:t>#   -&gt; {'score': 4, 'reason': '...', 'judge': 'gemini'}</a:t>
-            </a:r>
-          </a:p>
-          <a:p>
-            <a:r>
-              <a:rPr sz="1500">
-                <a:solidFill>
-                  <a:srgbClr val="E6E6E6"/>
-                </a:solidFill>
-                <a:latin typeface="Consolas"/>
-              </a:rPr>
-              <a:t> </a:t>
-            </a:r>
-          </a:p>
-          <a:p>
-            <a:r>
-              <a:rPr sz="1500">
-                <a:solidFill>
-                  <a:srgbClr val="E6E6E6"/>
-                </a:solidFill>
-                <a:latin typeface="Consolas"/>
-              </a:rPr>
-              <a:t>rows = [{'q': q, **rag_triad(rag(q))} for q in EVAL_QS]</a:t>
-            </a:r>
-          </a:p>
-          <a:p>
-            <a:r>
-              <a:rPr sz="1500">
-                <a:solidFill>
-                  <a:srgbClr val="E6E6E6"/>
-                </a:solidFill>
-                <a:latin typeface="Consolas"/>
-              </a:rPr>
-              <a:t>scorecard(rows)   # per-question + average triad</a:t>
-            </a:r>
-          </a:p>
-        </p:txBody>
-      </p:sp>
-      <p:sp>
-        <p:nvSpPr>
-          <p:cNvPr id="6" name="TextBox 5"/>
-          <p:cNvSpPr txBox="1"/>
-          <p:nvPr/>
-        </p:nvSpPr>
-        <p:spPr>
-          <a:xfrm>
-            <a:off x="548640" y="5897880"/>
-            <a:ext cx="10515600" cy="457200"/>
-          </a:xfrm>
-          <a:prstGeom prst="rect">
-            <a:avLst/>
-          </a:prstGeom>
-          <a:noFill/>
-        </p:spPr>
-        <p:txBody>
-          <a:bodyPr wrap="square">
-            <a:spAutoFit/>
-          </a:bodyPr>
-          <a:lstStyle/>
-          <a:p>
-            <a:pPr algn="l"/>
-            <a:r>
-              <a:rPr sz="1400" b="0">
-                <a:solidFill>
-                  <a:srgbClr val="6B7280"/>
-                </a:solidFill>
-                <a:latin typeface="Calibri"/>
-              </a:rPr>
-              <a:t>Gemini Flash / Claude Haiku judge; heuristic fallback with no key — never crashes</a:t>
-            </a:r>
-          </a:p>
-        </p:txBody>
-      </p:sp>
-      <p:sp>
-        <p:nvSpPr>
-          <p:cNvPr id="7" name="TextBox 6"/>
-          <p:cNvSpPr txBox="1"/>
-          <p:nvPr/>
-        </p:nvSpPr>
-        <p:spPr>
-          <a:xfrm>
-            <a:off x="365760" y="6446520"/>
-            <a:ext cx="8229600" cy="365760"/>
-          </a:xfrm>
-          <a:prstGeom prst="rect">
-            <a:avLst/>
-          </a:prstGeom>
-          <a:noFill/>
-        </p:spPr>
-        <p:txBody>
-          <a:bodyPr wrap="square">
-            <a:spAutoFit/>
-          </a:bodyPr>
-          <a:lstStyle/>
-          <a:p>
-            <a:pPr algn="l"/>
-            <a:r>
-              <a:rPr sz="1000" b="0">
-                <a:solidFill>
-                  <a:srgbClr val="6B7280"/>
-                </a:solidFill>
-                <a:latin typeface="Calibri"/>
-              </a:rPr>
-              <a:t>Palomar College · CSCI 250 · Fall 2026</a:t>
-            </a:r>
-          </a:p>
-        </p:txBody>
-      </p:sp>
-      <p:sp>
-        <p:nvSpPr>
-          <p:cNvPr id="8" name="TextBox 7"/>
-          <p:cNvSpPr txBox="1"/>
-          <p:nvPr/>
-        </p:nvSpPr>
-        <p:spPr>
-          <a:xfrm>
-            <a:off x="11155680" y="6446520"/>
-            <a:ext cx="822960" cy="365760"/>
-          </a:xfrm>
-          <a:prstGeom prst="rect">
-            <a:avLst/>
-          </a:prstGeom>
-          <a:noFill/>
-        </p:spPr>
-        <p:txBody>
-          <a:bodyPr wrap="square">
-            <a:spAutoFit/>
-          </a:bodyPr>
-          <a:lstStyle/>
-          <a:p>
-            <a:pPr algn="r"/>
-            <a:r>
-              <a:rPr sz="1000" b="0">
-                <a:solidFill>
-                  <a:srgbClr val="6B7280"/>
-                </a:solidFill>
-                <a:latin typeface="Calibri"/>
-              </a:rPr>
-              <a:t>13/15</a:t>
+              <a:t>Evaluate RAG — Measure, Don't Guess</a:t>
             </a:r>
           </a:p>
         </p:txBody>
@@ -4609,7 +4309,7 @@
                 </a:solidFill>
                 <a:latin typeface="Calibri"/>
               </a:rPr>
-              <a:t>Baseline → Change One Thing → Re-measure</a:t>
+              <a:t>The RAG Triad</a:t>
             </a:r>
           </a:p>
         </p:txBody>
@@ -4622,8 +4322,43 @@
         </p:nvSpPr>
         <p:spPr>
           <a:xfrm>
-            <a:off x="731520" y="1371600"/>
-            <a:ext cx="10698480" cy="4754880"/>
+            <a:off x="731520" y="1280160"/>
+            <a:ext cx="5120640" cy="548640"/>
+          </a:xfrm>
+          <a:prstGeom prst="rect">
+            <a:avLst/>
+          </a:prstGeom>
+          <a:noFill/>
+        </p:spPr>
+        <p:txBody>
+          <a:bodyPr wrap="square">
+            <a:spAutoFit/>
+          </a:bodyPr>
+          <a:lstStyle/>
+          <a:p>
+            <a:pPr algn="l"/>
+            <a:r>
+              <a:rPr sz="2000" b="1">
+                <a:solidFill>
+                  <a:srgbClr val="128C8C"/>
+                </a:solidFill>
+                <a:latin typeface="Calibri"/>
+              </a:rPr>
+              <a:t>Three links to check</a:t>
+            </a:r>
+          </a:p>
+        </p:txBody>
+      </p:sp>
+      <p:sp>
+        <p:nvSpPr>
+          <p:cNvPr id="6" name="TextBox 5"/>
+          <p:cNvSpPr txBox="1"/>
+          <p:nvPr/>
+        </p:nvSpPr>
+        <p:spPr>
+          <a:xfrm>
+            <a:off x="731520" y="1828800"/>
+            <a:ext cx="5120640" cy="4206240"/>
           </a:xfrm>
           <a:prstGeom prst="rect">
             <a:avLst/>
@@ -4642,13 +4377,13 @@
               </a:spcAft>
             </a:pPr>
             <a:r>
-              <a:rPr sz="2000">
+              <a:rPr sz="1800">
                 <a:solidFill>
                   <a:srgbClr val="1A1A1A"/>
                 </a:solidFill>
                 <a:latin typeface="Calibri"/>
               </a:rPr>
-              <a:t>• Pin a FIXED set of eval questions (a test set)</a:t>
+              <a:t>• Context Relevance: right chunks?</a:t>
             </a:r>
           </a:p>
           <a:p>
@@ -4658,13 +4393,13 @@
               </a:spcAft>
             </a:pPr>
             <a:r>
-              <a:rPr sz="2000">
+              <a:rPr sz="1800">
                 <a:solidFill>
                   <a:srgbClr val="1A1A1A"/>
                 </a:solidFill>
                 <a:latin typeface="Calibri"/>
               </a:rPr>
-              <a:t>• Score a baseline config; print the scorecard</a:t>
+              <a:t>• Groundedness: answer supported?</a:t>
             </a:r>
           </a:p>
           <a:p>
@@ -4674,45 +4409,13 @@
               </a:spcAft>
             </a:pPr>
             <a:r>
-              <a:rPr sz="2000">
+              <a:rPr sz="1800">
                 <a:solidFill>
                   <a:srgbClr val="1A1A1A"/>
                 </a:solidFill>
                 <a:latin typeface="Calibri"/>
               </a:rPr>
-              <a:t>• Change one thing (chunk_size 120 -&gt; 300)</a:t>
-            </a:r>
-          </a:p>
-          <a:p>
-            <a:pPr lvl="1">
-              <a:spcAft>
-                <a:spcPts val="800"/>
-              </a:spcAft>
-            </a:pPr>
-            <a:r>
-              <a:rPr sz="1800">
-                <a:solidFill>
-                  <a:srgbClr val="6B7280"/>
-                </a:solidFill>
-                <a:latin typeface="Calibri"/>
-              </a:rPr>
-              <a:t>– Re-measure on the SAME questions — compare averages</a:t>
-            </a:r>
-          </a:p>
-          <a:p>
-            <a:pPr lvl="1">
-              <a:spcAft>
-                <a:spcPts val="800"/>
-              </a:spcAft>
-            </a:pPr>
-            <a:r>
-              <a:rPr sz="1800">
-                <a:solidFill>
-                  <a:srgbClr val="6B7280"/>
-                </a:solidFill>
-                <a:latin typeface="Calibri"/>
-              </a:rPr>
-              <a:t>– Higher triad wins; ties go to the simpler/cheaper config</a:t>
+              <a:t>• Answer Relevance: on topic?</a:t>
             </a:r>
           </a:p>
           <a:p>
@@ -4722,27 +4425,27 @@
               </a:spcAft>
             </a:pPr>
             <a:r>
-              <a:rPr sz="2000">
+              <a:rPr sz="1800">
                 <a:solidFill>
                   <a:srgbClr val="1A1A1A"/>
                 </a:solidFill>
                 <a:latin typeface="Calibri"/>
               </a:rPr>
-              <a:t>• This is how you improve RAG without fooling yourself</a:t>
-            </a:r>
-          </a:p>
-        </p:txBody>
-      </p:sp>
-      <p:sp>
-        <p:nvSpPr>
-          <p:cNvPr id="6" name="TextBox 5"/>
+              <a:t>• Each scored 1-5 by an LLM judge</a:t>
+            </a:r>
+          </a:p>
+        </p:txBody>
+      </p:sp>
+      <p:sp>
+        <p:nvSpPr>
+          <p:cNvPr id="7" name="TextBox 6"/>
           <p:cNvSpPr txBox="1"/>
           <p:nvPr/>
         </p:nvSpPr>
         <p:spPr>
           <a:xfrm>
-            <a:off x="365760" y="6446520"/>
-            <a:ext cx="8229600" cy="365760"/>
+            <a:off x="6309360" y="1280160"/>
+            <a:ext cx="5120640" cy="548640"/>
           </a:xfrm>
           <a:prstGeom prst="rect">
             <a:avLst/>
@@ -4757,27 +4460,27 @@
           <a:p>
             <a:pPr algn="l"/>
             <a:r>
-              <a:rPr sz="1000" b="0">
-                <a:solidFill>
-                  <a:srgbClr val="6B7280"/>
-                </a:solidFill>
-                <a:latin typeface="Calibri"/>
-              </a:rPr>
-              <a:t>Palomar College · CSCI 250 · Fall 2026</a:t>
-            </a:r>
-          </a:p>
-        </p:txBody>
-      </p:sp>
-      <p:sp>
-        <p:nvSpPr>
-          <p:cNvPr id="7" name="TextBox 6"/>
+              <a:rPr sz="2000" b="1">
+                <a:solidFill>
+                  <a:srgbClr val="128C8C"/>
+                </a:solidFill>
+                <a:latin typeface="Calibri"/>
+              </a:rPr>
+              <a:t>Why it's powerful</a:t>
+            </a:r>
+          </a:p>
+        </p:txBody>
+      </p:sp>
+      <p:sp>
+        <p:nvSpPr>
+          <p:cNvPr id="8" name="TextBox 7"/>
           <p:cNvSpPr txBox="1"/>
           <p:nvPr/>
         </p:nvSpPr>
         <p:spPr>
           <a:xfrm>
-            <a:off x="11155680" y="6446520"/>
-            <a:ext cx="822960" cy="365760"/>
+            <a:off x="6309360" y="1828800"/>
+            <a:ext cx="5120640" cy="4206240"/>
           </a:xfrm>
           <a:prstGeom prst="rect">
             <a:avLst/>
@@ -4790,6 +4493,128 @@
           </a:bodyPr>
           <a:lstStyle/>
           <a:p>
+            <a:pPr>
+              <a:spcAft>
+                <a:spcPts val="800"/>
+              </a:spcAft>
+            </a:pPr>
+            <a:r>
+              <a:rPr sz="1800">
+                <a:solidFill>
+                  <a:srgbClr val="1A1A1A"/>
+                </a:solidFill>
+                <a:latin typeface="Calibri"/>
+              </a:rPr>
+              <a:t>• Localizes the failure</a:t>
+            </a:r>
+          </a:p>
+          <a:p>
+            <a:pPr>
+              <a:spcAft>
+                <a:spcPts val="800"/>
+              </a:spcAft>
+            </a:pPr>
+            <a:r>
+              <a:rPr sz="1800">
+                <a:solidFill>
+                  <a:srgbClr val="1A1A1A"/>
+                </a:solidFill>
+                <a:latin typeface="Calibri"/>
+              </a:rPr>
+              <a:t>• Low context -&gt; fix retrieval</a:t>
+            </a:r>
+          </a:p>
+          <a:p>
+            <a:pPr>
+              <a:spcAft>
+                <a:spcPts val="800"/>
+              </a:spcAft>
+            </a:pPr>
+            <a:r>
+              <a:rPr sz="1800">
+                <a:solidFill>
+                  <a:srgbClr val="1A1A1A"/>
+                </a:solidFill>
+                <a:latin typeface="Calibri"/>
+              </a:rPr>
+              <a:t>• Low groundedness -&gt; fix prompt</a:t>
+            </a:r>
+          </a:p>
+          <a:p>
+            <a:pPr>
+              <a:spcAft>
+                <a:spcPts val="800"/>
+              </a:spcAft>
+            </a:pPr>
+            <a:r>
+              <a:rPr sz="1800">
+                <a:solidFill>
+                  <a:srgbClr val="1A1A1A"/>
+                </a:solidFill>
+                <a:latin typeface="Calibri"/>
+              </a:rPr>
+              <a:t>• Low answer rel. -&gt; fix framing</a:t>
+            </a:r>
+          </a:p>
+        </p:txBody>
+      </p:sp>
+      <p:sp>
+        <p:nvSpPr>
+          <p:cNvPr id="9" name="TextBox 8"/>
+          <p:cNvSpPr txBox="1"/>
+          <p:nvPr/>
+        </p:nvSpPr>
+        <p:spPr>
+          <a:xfrm>
+            <a:off x="365760" y="6446520"/>
+            <a:ext cx="8229600" cy="365760"/>
+          </a:xfrm>
+          <a:prstGeom prst="rect">
+            <a:avLst/>
+          </a:prstGeom>
+          <a:noFill/>
+        </p:spPr>
+        <p:txBody>
+          <a:bodyPr wrap="square">
+            <a:spAutoFit/>
+          </a:bodyPr>
+          <a:lstStyle/>
+          <a:p>
+            <a:pPr algn="l"/>
+            <a:r>
+              <a:rPr sz="1000" b="0">
+                <a:solidFill>
+                  <a:srgbClr val="6B7280"/>
+                </a:solidFill>
+                <a:latin typeface="Calibri"/>
+              </a:rPr>
+              <a:t>Palomar College · CSCI 250 · Fall 2026</a:t>
+            </a:r>
+          </a:p>
+        </p:txBody>
+      </p:sp>
+      <p:sp>
+        <p:nvSpPr>
+          <p:cNvPr id="10" name="TextBox 9"/>
+          <p:cNvSpPr txBox="1"/>
+          <p:nvPr/>
+        </p:nvSpPr>
+        <p:spPr>
+          <a:xfrm>
+            <a:off x="11155680" y="6446520"/>
+            <a:ext cx="822960" cy="365760"/>
+          </a:xfrm>
+          <a:prstGeom prst="rect">
+            <a:avLst/>
+          </a:prstGeom>
+          <a:noFill/>
+        </p:spPr>
+        <p:txBody>
+          <a:bodyPr wrap="square">
+            <a:spAutoFit/>
+          </a:bodyPr>
+          <a:lstStyle/>
+          <a:p>
             <a:pPr algn="r"/>
             <a:r>
               <a:rPr sz="1000" b="0">
@@ -4798,7 +4623,7 @@
                 </a:solidFill>
                 <a:latin typeface="Calibri"/>
               </a:rPr>
-              <a:t>14/15</a:t>
+              <a:t>14/17</a:t>
             </a:r>
           </a:p>
         </p:txBody>
@@ -4812,6 +4637,739 @@
 </file>
 
 <file path=ppt/slides/slide15.xml><?xml version="1.0" encoding="utf-8"?>
+<p:sld xmlns:a="http://schemas.openxmlformats.org/drawingml/2006/main" xmlns:p="http://schemas.openxmlformats.org/presentationml/2006/main" xmlns:r="http://schemas.openxmlformats.org/officeDocument/2006/relationships">
+  <p:cSld>
+    <p:bg>
+      <p:bgPr>
+        <a:solidFill>
+          <a:srgbClr val="FFFFFF"/>
+        </a:solidFill>
+        <a:effectLst/>
+      </p:bgPr>
+    </p:bg>
+    <p:spTree>
+      <p:nvGrpSpPr>
+        <p:cNvPr id="1" name=""/>
+        <p:cNvGrpSpPr/>
+        <p:nvPr/>
+      </p:nvGrpSpPr>
+      <p:grpSpPr/>
+      <p:sp>
+        <p:nvSpPr>
+          <p:cNvPr id="2" name="Rectangle 1"/>
+          <p:cNvSpPr/>
+          <p:nvPr/>
+        </p:nvSpPr>
+        <p:spPr>
+          <a:xfrm>
+            <a:off x="0" y="0"/>
+            <a:ext cx="12191695" cy="1051560"/>
+          </a:xfrm>
+          <a:prstGeom prst="rect">
+            <a:avLst/>
+          </a:prstGeom>
+          <a:solidFill>
+            <a:srgbClr val="0B1F3A"/>
+          </a:solidFill>
+          <a:ln>
+            <a:noFill/>
+          </a:ln>
+          <a:effectLst/>
+        </p:spPr>
+        <p:style>
+          <a:lnRef idx="1">
+            <a:schemeClr val="accent1"/>
+          </a:lnRef>
+          <a:fillRef idx="3">
+            <a:schemeClr val="accent1"/>
+          </a:fillRef>
+          <a:effectRef idx="2">
+            <a:schemeClr val="accent1"/>
+          </a:effectRef>
+          <a:fontRef idx="minor">
+            <a:schemeClr val="lt1"/>
+          </a:fontRef>
+        </p:style>
+        <p:txBody>
+          <a:bodyPr rtlCol="0" anchor="ctr"/>
+          <a:lstStyle/>
+          <a:p>
+            <a:pPr algn="ctr"/>
+          </a:p>
+        </p:txBody>
+      </p:sp>
+      <p:sp>
+        <p:nvSpPr>
+          <p:cNvPr id="3" name="Rectangle 2"/>
+          <p:cNvSpPr/>
+          <p:nvPr/>
+        </p:nvSpPr>
+        <p:spPr>
+          <a:xfrm>
+            <a:off x="0" y="1051560"/>
+            <a:ext cx="12191695" cy="54864"/>
+          </a:xfrm>
+          <a:prstGeom prst="rect">
+            <a:avLst/>
+          </a:prstGeom>
+          <a:solidFill>
+            <a:srgbClr val="128C8C"/>
+          </a:solidFill>
+          <a:ln>
+            <a:noFill/>
+          </a:ln>
+          <a:effectLst/>
+        </p:spPr>
+        <p:style>
+          <a:lnRef idx="1">
+            <a:schemeClr val="accent1"/>
+          </a:lnRef>
+          <a:fillRef idx="3">
+            <a:schemeClr val="accent1"/>
+          </a:fillRef>
+          <a:effectRef idx="2">
+            <a:schemeClr val="accent1"/>
+          </a:effectRef>
+          <a:fontRef idx="minor">
+            <a:schemeClr val="lt1"/>
+          </a:fontRef>
+        </p:style>
+        <p:txBody>
+          <a:bodyPr rtlCol="0" anchor="ctr"/>
+          <a:lstStyle/>
+          <a:p>
+            <a:pPr algn="ctr"/>
+          </a:p>
+        </p:txBody>
+      </p:sp>
+      <p:sp>
+        <p:nvSpPr>
+          <p:cNvPr id="4" name="TextBox 3"/>
+          <p:cNvSpPr txBox="1"/>
+          <p:nvPr/>
+        </p:nvSpPr>
+        <p:spPr>
+          <a:xfrm>
+            <a:off x="548640" y="201168"/>
+            <a:ext cx="11064240" cy="731520"/>
+          </a:xfrm>
+          <a:prstGeom prst="rect">
+            <a:avLst/>
+          </a:prstGeom>
+          <a:noFill/>
+        </p:spPr>
+        <p:txBody>
+          <a:bodyPr wrap="square" anchor="ctr">
+            <a:spAutoFit/>
+          </a:bodyPr>
+          <a:lstStyle/>
+          <a:p>
+            <a:pPr algn="l"/>
+            <a:r>
+              <a:rPr sz="2800" b="1">
+                <a:solidFill>
+                  <a:srgbClr val="FFFFFF"/>
+                </a:solidFill>
+                <a:latin typeface="Calibri"/>
+              </a:rPr>
+              <a:t>Score It With the Shared Helpers</a:t>
+            </a:r>
+          </a:p>
+        </p:txBody>
+      </p:sp>
+      <p:sp>
+        <p:nvSpPr>
+          <p:cNvPr id="5" name="Rectangle 4"/>
+          <p:cNvSpPr/>
+          <p:nvPr/>
+        </p:nvSpPr>
+        <p:spPr>
+          <a:xfrm>
+            <a:off x="548640" y="1325880"/>
+            <a:ext cx="11064240" cy="4480560"/>
+          </a:xfrm>
+          <a:prstGeom prst="rect">
+            <a:avLst/>
+          </a:prstGeom>
+          <a:solidFill>
+            <a:srgbClr val="1E1E1E"/>
+          </a:solidFill>
+          <a:ln>
+            <a:noFill/>
+          </a:ln>
+          <a:effectLst/>
+        </p:spPr>
+        <p:style>
+          <a:lnRef idx="1">
+            <a:schemeClr val="accent1"/>
+          </a:lnRef>
+          <a:fillRef idx="3">
+            <a:schemeClr val="accent1"/>
+          </a:fillRef>
+          <a:effectRef idx="2">
+            <a:schemeClr val="accent1"/>
+          </a:effectRef>
+          <a:fontRef idx="minor">
+            <a:schemeClr val="lt1"/>
+          </a:fontRef>
+        </p:style>
+        <p:txBody>
+          <a:bodyPr rtlCol="0" anchor="ctr" wrap="square" lIns="182880" tIns="137160"/>
+          <a:lstStyle/>
+          <a:p>
+            <a:pPr algn="ctr"/>
+            <a:r>
+              <a:rPr sz="1500">
+                <a:solidFill>
+                  <a:srgbClr val="E6E6E6"/>
+                </a:solidFill>
+                <a:latin typeface="Consolas"/>
+              </a:rPr>
+              <a:t>from eval_utils import llm_judge, scorecard</a:t>
+            </a:r>
+          </a:p>
+          <a:p>
+            <a:r>
+              <a:rPr sz="1500">
+                <a:solidFill>
+                  <a:srgbClr val="E6E6E6"/>
+                </a:solidFill>
+                <a:latin typeface="Consolas"/>
+              </a:rPr>
+              <a:t> </a:t>
+            </a:r>
+          </a:p>
+          <a:p>
+            <a:r>
+              <a:rPr sz="1500">
+                <a:solidFill>
+                  <a:srgbClr val="E6E6E6"/>
+                </a:solidFill>
+                <a:latin typeface="Consolas"/>
+              </a:rPr>
+              <a:t>rubric = ('Rate 1-5 how RELEVANT the answer is. '</a:t>
+            </a:r>
+          </a:p>
+          <a:p>
+            <a:r>
+              <a:rPr sz="1500">
+                <a:solidFill>
+                  <a:srgbClr val="E6E6E6"/>
+                </a:solidFill>
+                <a:latin typeface="Consolas"/>
+              </a:rPr>
+              <a:t>          'Return ONLY JSON: {"score": &lt;int&gt;, "reason": ""}.')</a:t>
+            </a:r>
+          </a:p>
+          <a:p>
+            <a:r>
+              <a:rPr sz="1500">
+                <a:solidFill>
+                  <a:srgbClr val="E6E6E6"/>
+                </a:solidFill>
+                <a:latin typeface="Consolas"/>
+              </a:rPr>
+              <a:t>llm_judge(question, answer, rubric)</a:t>
+            </a:r>
+          </a:p>
+          <a:p>
+            <a:r>
+              <a:rPr sz="1500">
+                <a:solidFill>
+                  <a:srgbClr val="E6E6E6"/>
+                </a:solidFill>
+                <a:latin typeface="Consolas"/>
+              </a:rPr>
+              <a:t>#   -&gt; {'score': 4, 'reason': '...', 'judge': 'gemini'}</a:t>
+            </a:r>
+          </a:p>
+          <a:p>
+            <a:r>
+              <a:rPr sz="1500">
+                <a:solidFill>
+                  <a:srgbClr val="E6E6E6"/>
+                </a:solidFill>
+                <a:latin typeface="Consolas"/>
+              </a:rPr>
+              <a:t> </a:t>
+            </a:r>
+          </a:p>
+          <a:p>
+            <a:r>
+              <a:rPr sz="1500">
+                <a:solidFill>
+                  <a:srgbClr val="E6E6E6"/>
+                </a:solidFill>
+                <a:latin typeface="Consolas"/>
+              </a:rPr>
+              <a:t>rows = [{'q': q, **rag_triad(rag(q))} for q in EVAL_QS]</a:t>
+            </a:r>
+          </a:p>
+          <a:p>
+            <a:r>
+              <a:rPr sz="1500">
+                <a:solidFill>
+                  <a:srgbClr val="E6E6E6"/>
+                </a:solidFill>
+                <a:latin typeface="Consolas"/>
+              </a:rPr>
+              <a:t>scorecard(rows)   # per-question + average triad</a:t>
+            </a:r>
+          </a:p>
+        </p:txBody>
+      </p:sp>
+      <p:sp>
+        <p:nvSpPr>
+          <p:cNvPr id="6" name="TextBox 5"/>
+          <p:cNvSpPr txBox="1"/>
+          <p:nvPr/>
+        </p:nvSpPr>
+        <p:spPr>
+          <a:xfrm>
+            <a:off x="548640" y="5897880"/>
+            <a:ext cx="10515600" cy="457200"/>
+          </a:xfrm>
+          <a:prstGeom prst="rect">
+            <a:avLst/>
+          </a:prstGeom>
+          <a:noFill/>
+        </p:spPr>
+        <p:txBody>
+          <a:bodyPr wrap="square">
+            <a:spAutoFit/>
+          </a:bodyPr>
+          <a:lstStyle/>
+          <a:p>
+            <a:pPr algn="l"/>
+            <a:r>
+              <a:rPr sz="1400" b="0">
+                <a:solidFill>
+                  <a:srgbClr val="6B7280"/>
+                </a:solidFill>
+                <a:latin typeface="Calibri"/>
+              </a:rPr>
+              <a:t>Gemini Flash / Claude Haiku judge; heuristic fallback with no key — never crashes</a:t>
+            </a:r>
+          </a:p>
+        </p:txBody>
+      </p:sp>
+      <p:sp>
+        <p:nvSpPr>
+          <p:cNvPr id="7" name="TextBox 6"/>
+          <p:cNvSpPr txBox="1"/>
+          <p:nvPr/>
+        </p:nvSpPr>
+        <p:spPr>
+          <a:xfrm>
+            <a:off x="365760" y="6446520"/>
+            <a:ext cx="8229600" cy="365760"/>
+          </a:xfrm>
+          <a:prstGeom prst="rect">
+            <a:avLst/>
+          </a:prstGeom>
+          <a:noFill/>
+        </p:spPr>
+        <p:txBody>
+          <a:bodyPr wrap="square">
+            <a:spAutoFit/>
+          </a:bodyPr>
+          <a:lstStyle/>
+          <a:p>
+            <a:pPr algn="l"/>
+            <a:r>
+              <a:rPr sz="1000" b="0">
+                <a:solidFill>
+                  <a:srgbClr val="6B7280"/>
+                </a:solidFill>
+                <a:latin typeface="Calibri"/>
+              </a:rPr>
+              <a:t>Palomar College · CSCI 250 · Fall 2026</a:t>
+            </a:r>
+          </a:p>
+        </p:txBody>
+      </p:sp>
+      <p:sp>
+        <p:nvSpPr>
+          <p:cNvPr id="8" name="TextBox 7"/>
+          <p:cNvSpPr txBox="1"/>
+          <p:nvPr/>
+        </p:nvSpPr>
+        <p:spPr>
+          <a:xfrm>
+            <a:off x="11155680" y="6446520"/>
+            <a:ext cx="822960" cy="365760"/>
+          </a:xfrm>
+          <a:prstGeom prst="rect">
+            <a:avLst/>
+          </a:prstGeom>
+          <a:noFill/>
+        </p:spPr>
+        <p:txBody>
+          <a:bodyPr wrap="square">
+            <a:spAutoFit/>
+          </a:bodyPr>
+          <a:lstStyle/>
+          <a:p>
+            <a:pPr algn="r"/>
+            <a:r>
+              <a:rPr sz="1000" b="0">
+                <a:solidFill>
+                  <a:srgbClr val="6B7280"/>
+                </a:solidFill>
+                <a:latin typeface="Calibri"/>
+              </a:rPr>
+              <a:t>15/17</a:t>
+            </a:r>
+          </a:p>
+        </p:txBody>
+      </p:sp>
+    </p:spTree>
+  </p:cSld>
+  <p:clrMapOvr>
+    <a:masterClrMapping/>
+  </p:clrMapOvr>
+</p:sld>
+</file>
+
+<file path=ppt/slides/slide16.xml><?xml version="1.0" encoding="utf-8"?>
+<p:sld xmlns:a="http://schemas.openxmlformats.org/drawingml/2006/main" xmlns:p="http://schemas.openxmlformats.org/presentationml/2006/main" xmlns:r="http://schemas.openxmlformats.org/officeDocument/2006/relationships">
+  <p:cSld>
+    <p:bg>
+      <p:bgPr>
+        <a:solidFill>
+          <a:srgbClr val="FFFFFF"/>
+        </a:solidFill>
+        <a:effectLst/>
+      </p:bgPr>
+    </p:bg>
+    <p:spTree>
+      <p:nvGrpSpPr>
+        <p:cNvPr id="1" name=""/>
+        <p:cNvGrpSpPr/>
+        <p:nvPr/>
+      </p:nvGrpSpPr>
+      <p:grpSpPr/>
+      <p:sp>
+        <p:nvSpPr>
+          <p:cNvPr id="2" name="Rectangle 1"/>
+          <p:cNvSpPr/>
+          <p:nvPr/>
+        </p:nvSpPr>
+        <p:spPr>
+          <a:xfrm>
+            <a:off x="0" y="0"/>
+            <a:ext cx="12191695" cy="1051560"/>
+          </a:xfrm>
+          <a:prstGeom prst="rect">
+            <a:avLst/>
+          </a:prstGeom>
+          <a:solidFill>
+            <a:srgbClr val="0B1F3A"/>
+          </a:solidFill>
+          <a:ln>
+            <a:noFill/>
+          </a:ln>
+          <a:effectLst/>
+        </p:spPr>
+        <p:style>
+          <a:lnRef idx="1">
+            <a:schemeClr val="accent1"/>
+          </a:lnRef>
+          <a:fillRef idx="3">
+            <a:schemeClr val="accent1"/>
+          </a:fillRef>
+          <a:effectRef idx="2">
+            <a:schemeClr val="accent1"/>
+          </a:effectRef>
+          <a:fontRef idx="minor">
+            <a:schemeClr val="lt1"/>
+          </a:fontRef>
+        </p:style>
+        <p:txBody>
+          <a:bodyPr rtlCol="0" anchor="ctr"/>
+          <a:lstStyle/>
+          <a:p>
+            <a:pPr algn="ctr"/>
+          </a:p>
+        </p:txBody>
+      </p:sp>
+      <p:sp>
+        <p:nvSpPr>
+          <p:cNvPr id="3" name="Rectangle 2"/>
+          <p:cNvSpPr/>
+          <p:nvPr/>
+        </p:nvSpPr>
+        <p:spPr>
+          <a:xfrm>
+            <a:off x="0" y="1051560"/>
+            <a:ext cx="12191695" cy="54864"/>
+          </a:xfrm>
+          <a:prstGeom prst="rect">
+            <a:avLst/>
+          </a:prstGeom>
+          <a:solidFill>
+            <a:srgbClr val="128C8C"/>
+          </a:solidFill>
+          <a:ln>
+            <a:noFill/>
+          </a:ln>
+          <a:effectLst/>
+        </p:spPr>
+        <p:style>
+          <a:lnRef idx="1">
+            <a:schemeClr val="accent1"/>
+          </a:lnRef>
+          <a:fillRef idx="3">
+            <a:schemeClr val="accent1"/>
+          </a:fillRef>
+          <a:effectRef idx="2">
+            <a:schemeClr val="accent1"/>
+          </a:effectRef>
+          <a:fontRef idx="minor">
+            <a:schemeClr val="lt1"/>
+          </a:fontRef>
+        </p:style>
+        <p:txBody>
+          <a:bodyPr rtlCol="0" anchor="ctr"/>
+          <a:lstStyle/>
+          <a:p>
+            <a:pPr algn="ctr"/>
+          </a:p>
+        </p:txBody>
+      </p:sp>
+      <p:sp>
+        <p:nvSpPr>
+          <p:cNvPr id="4" name="TextBox 3"/>
+          <p:cNvSpPr txBox="1"/>
+          <p:nvPr/>
+        </p:nvSpPr>
+        <p:spPr>
+          <a:xfrm>
+            <a:off x="548640" y="201168"/>
+            <a:ext cx="11064240" cy="731520"/>
+          </a:xfrm>
+          <a:prstGeom prst="rect">
+            <a:avLst/>
+          </a:prstGeom>
+          <a:noFill/>
+        </p:spPr>
+        <p:txBody>
+          <a:bodyPr wrap="square" anchor="ctr">
+            <a:spAutoFit/>
+          </a:bodyPr>
+          <a:lstStyle/>
+          <a:p>
+            <a:pPr algn="l"/>
+            <a:r>
+              <a:rPr sz="2800" b="1">
+                <a:solidFill>
+                  <a:srgbClr val="FFFFFF"/>
+                </a:solidFill>
+                <a:latin typeface="Calibri"/>
+              </a:rPr>
+              <a:t>Baseline → Change One Thing → Re-measure</a:t>
+            </a:r>
+          </a:p>
+        </p:txBody>
+      </p:sp>
+      <p:sp>
+        <p:nvSpPr>
+          <p:cNvPr id="5" name="TextBox 4"/>
+          <p:cNvSpPr txBox="1"/>
+          <p:nvPr/>
+        </p:nvSpPr>
+        <p:spPr>
+          <a:xfrm>
+            <a:off x="731520" y="1371600"/>
+            <a:ext cx="10698480" cy="4754880"/>
+          </a:xfrm>
+          <a:prstGeom prst="rect">
+            <a:avLst/>
+          </a:prstGeom>
+          <a:noFill/>
+        </p:spPr>
+        <p:txBody>
+          <a:bodyPr wrap="square">
+            <a:spAutoFit/>
+          </a:bodyPr>
+          <a:lstStyle/>
+          <a:p>
+            <a:pPr>
+              <a:spcAft>
+                <a:spcPts val="800"/>
+              </a:spcAft>
+            </a:pPr>
+            <a:r>
+              <a:rPr sz="2000">
+                <a:solidFill>
+                  <a:srgbClr val="1A1A1A"/>
+                </a:solidFill>
+                <a:latin typeface="Calibri"/>
+              </a:rPr>
+              <a:t>• Pin a FIXED set of eval questions (a test set)</a:t>
+            </a:r>
+          </a:p>
+          <a:p>
+            <a:pPr>
+              <a:spcAft>
+                <a:spcPts val="800"/>
+              </a:spcAft>
+            </a:pPr>
+            <a:r>
+              <a:rPr sz="2000">
+                <a:solidFill>
+                  <a:srgbClr val="1A1A1A"/>
+                </a:solidFill>
+                <a:latin typeface="Calibri"/>
+              </a:rPr>
+              <a:t>• Score a baseline config; print the scorecard</a:t>
+            </a:r>
+          </a:p>
+          <a:p>
+            <a:pPr>
+              <a:spcAft>
+                <a:spcPts val="800"/>
+              </a:spcAft>
+            </a:pPr>
+            <a:r>
+              <a:rPr sz="2000">
+                <a:solidFill>
+                  <a:srgbClr val="1A1A1A"/>
+                </a:solidFill>
+                <a:latin typeface="Calibri"/>
+              </a:rPr>
+              <a:t>• Change one thing (chunk_size 120 -&gt; 300)</a:t>
+            </a:r>
+          </a:p>
+          <a:p>
+            <a:pPr lvl="1">
+              <a:spcAft>
+                <a:spcPts val="800"/>
+              </a:spcAft>
+            </a:pPr>
+            <a:r>
+              <a:rPr sz="1800">
+                <a:solidFill>
+                  <a:srgbClr val="6B7280"/>
+                </a:solidFill>
+                <a:latin typeface="Calibri"/>
+              </a:rPr>
+              <a:t>– Re-measure on the SAME questions — compare averages</a:t>
+            </a:r>
+          </a:p>
+          <a:p>
+            <a:pPr lvl="1">
+              <a:spcAft>
+                <a:spcPts val="800"/>
+              </a:spcAft>
+            </a:pPr>
+            <a:r>
+              <a:rPr sz="1800">
+                <a:solidFill>
+                  <a:srgbClr val="6B7280"/>
+                </a:solidFill>
+                <a:latin typeface="Calibri"/>
+              </a:rPr>
+              <a:t>– Higher triad wins; ties go to the simpler/cheaper config</a:t>
+            </a:r>
+          </a:p>
+          <a:p>
+            <a:pPr>
+              <a:spcAft>
+                <a:spcPts val="800"/>
+              </a:spcAft>
+            </a:pPr>
+            <a:r>
+              <a:rPr sz="2000">
+                <a:solidFill>
+                  <a:srgbClr val="1A1A1A"/>
+                </a:solidFill>
+                <a:latin typeface="Calibri"/>
+              </a:rPr>
+              <a:t>• This is how you improve RAG without fooling yourself</a:t>
+            </a:r>
+          </a:p>
+        </p:txBody>
+      </p:sp>
+      <p:sp>
+        <p:nvSpPr>
+          <p:cNvPr id="6" name="TextBox 5"/>
+          <p:cNvSpPr txBox="1"/>
+          <p:nvPr/>
+        </p:nvSpPr>
+        <p:spPr>
+          <a:xfrm>
+            <a:off x="365760" y="6446520"/>
+            <a:ext cx="8229600" cy="365760"/>
+          </a:xfrm>
+          <a:prstGeom prst="rect">
+            <a:avLst/>
+          </a:prstGeom>
+          <a:noFill/>
+        </p:spPr>
+        <p:txBody>
+          <a:bodyPr wrap="square">
+            <a:spAutoFit/>
+          </a:bodyPr>
+          <a:lstStyle/>
+          <a:p>
+            <a:pPr algn="l"/>
+            <a:r>
+              <a:rPr sz="1000" b="0">
+                <a:solidFill>
+                  <a:srgbClr val="6B7280"/>
+                </a:solidFill>
+                <a:latin typeface="Calibri"/>
+              </a:rPr>
+              <a:t>Palomar College · CSCI 250 · Fall 2026</a:t>
+            </a:r>
+          </a:p>
+        </p:txBody>
+      </p:sp>
+      <p:sp>
+        <p:nvSpPr>
+          <p:cNvPr id="7" name="TextBox 6"/>
+          <p:cNvSpPr txBox="1"/>
+          <p:nvPr/>
+        </p:nvSpPr>
+        <p:spPr>
+          <a:xfrm>
+            <a:off x="11155680" y="6446520"/>
+            <a:ext cx="822960" cy="365760"/>
+          </a:xfrm>
+          <a:prstGeom prst="rect">
+            <a:avLst/>
+          </a:prstGeom>
+          <a:noFill/>
+        </p:spPr>
+        <p:txBody>
+          <a:bodyPr wrap="square">
+            <a:spAutoFit/>
+          </a:bodyPr>
+          <a:lstStyle/>
+          <a:p>
+            <a:pPr algn="r"/>
+            <a:r>
+              <a:rPr sz="1000" b="0">
+                <a:solidFill>
+                  <a:srgbClr val="6B7280"/>
+                </a:solidFill>
+                <a:latin typeface="Calibri"/>
+              </a:rPr>
+              <a:t>16/17</a:t>
+            </a:r>
+          </a:p>
+        </p:txBody>
+      </p:sp>
+    </p:spTree>
+  </p:cSld>
+  <p:clrMapOvr>
+    <a:masterClrMapping/>
+  </p:clrMapOvr>
+</p:sld>
+</file>
+
+<file path=ppt/slides/slide17.xml><?xml version="1.0" encoding="utf-8"?>
 <p:sld xmlns:a="http://schemas.openxmlformats.org/drawingml/2006/main" xmlns:p="http://schemas.openxmlformats.org/presentationml/2006/main" xmlns:r="http://schemas.openxmlformats.org/officeDocument/2006/relationships">
   <p:cSld>
     <p:bg>
@@ -4974,7 +5532,7 @@
                 </a:solidFill>
                 <a:latin typeface="Calibri"/>
               </a:rPr>
-              <a:t>✓ Run 03_rag_evaluation.ipynb (RAG triad + re-measure)</a:t>
+              <a:t>✓ Run 03_rag_evaluation.ipynb (RAG triad + re-measure; key for real numbers)</a:t>
             </a:r>
           </a:p>
           <a:p>
@@ -4990,7 +5548,7 @@
                 </a:solidFill>
                 <a:latin typeface="Calibri"/>
               </a:rPr>
-              <a:t>✓ Try an out-of-scope question → expect "I don't know"</a:t>
+              <a:t>✓ Optional: 04_hybrid_rerank.ipynb (hybrid + cross-encoder rerank)</a:t>
             </a:r>
           </a:p>
           <a:p>
@@ -5006,7 +5564,7 @@
                 </a:solidFill>
                 <a:latin typeface="Calibri"/>
               </a:rPr>
-              <a:t>✓ Build your M2 core engine; save the pipeline for the Capstone</a:t>
+              <a:t>✓ Try an out-of-scope question → expect "I don't know"</a:t>
             </a:r>
           </a:p>
           <a:p>
@@ -5022,6 +5580,22 @@
                 </a:solidFill>
                 <a:latin typeface="Calibri"/>
               </a:rPr>
+              <a:t>✓ Build your M2 core engine; save the pipeline for the Capstone</a:t>
+            </a:r>
+          </a:p>
+          <a:p>
+            <a:pPr>
+              <a:spcAft>
+                <a:spcPts val="1200"/>
+              </a:spcAft>
+            </a:pPr>
+            <a:r>
+              <a:rPr sz="2200">
+                <a:solidFill>
+                  <a:srgbClr val="FFFFFF"/>
+                </a:solidFill>
+                <a:latin typeface="Calibri"/>
+              </a:rPr>
               <a:t>✓ Submit Capstone M2 by Sunday 11:59 PM PST</a:t>
             </a:r>
           </a:p>
@@ -5092,7 +5666,7 @@
                 </a:solidFill>
                 <a:latin typeface="Calibri"/>
               </a:rPr>
-              <a:t>15/15</a:t>
+              <a:t>17/17</a:t>
             </a:r>
           </a:p>
         </p:txBody>
@@ -5446,7 +6020,7 @@
                 </a:solidFill>
                 <a:latin typeface="Calibri"/>
               </a:rPr>
-              <a:t>2/15</a:t>
+              <a:t>2/17</a:t>
             </a:r>
           </a:p>
         </p:txBody>
@@ -5845,7 +6419,7 @@
                 </a:solidFill>
                 <a:latin typeface="Calibri"/>
               </a:rPr>
-              <a:t>4/15</a:t>
+              <a:t>4/17</a:t>
             </a:r>
           </a:p>
         </p:txBody>
@@ -6308,7 +6882,7 @@
                 </a:solidFill>
                 <a:latin typeface="Calibri"/>
               </a:rPr>
-              <a:t>5/15</a:t>
+              <a:t>5/17</a:t>
             </a:r>
           </a:p>
         </p:txBody>
@@ -6681,7 +7255,7 @@
                 </a:solidFill>
                 <a:latin typeface="Calibri"/>
               </a:rPr>
-              <a:t>6/15</a:t>
+              <a:t>6/17</a:t>
             </a:r>
           </a:p>
         </p:txBody>
@@ -7065,7 +7639,7 @@
                 </a:solidFill>
                 <a:latin typeface="Calibri"/>
               </a:rPr>
-              <a:t>7/15</a:t>
+              <a:t>7/17</a:t>
             </a:r>
           </a:p>
         </p:txBody>
@@ -7471,7 +8045,7 @@
                 </a:solidFill>
                 <a:latin typeface="Calibri"/>
               </a:rPr>
-              <a:t>8/15</a:t>
+              <a:t>8/17</a:t>
             </a:r>
           </a:p>
         </p:txBody>
@@ -7899,7 +8473,7 @@
                 </a:solidFill>
                 <a:latin typeface="Calibri"/>
               </a:rPr>
-              <a:t>9/15</a:t>
+              <a:t>9/17</a:t>
             </a:r>
           </a:p>
         </p:txBody>
